--- a/docs/meeting/2026_03_08.pptx
+++ b/docs/meeting/2026_03_08.pptx
@@ -5,7 +5,7 @@
     <p:sldMasterId id="2147483648" r:id="rId1"/>
   </p:sldMasterIdLst>
   <p:notesMasterIdLst>
-    <p:notesMasterId r:id="rId16"/>
+    <p:notesMasterId r:id="rId27"/>
   </p:notesMasterIdLst>
   <p:sldIdLst>
     <p:sldId id="1574" r:id="rId2"/>
@@ -16,12 +16,23 @@
     <p:sldId id="1582" r:id="rId7"/>
     <p:sldId id="1583" r:id="rId8"/>
     <p:sldId id="1591" r:id="rId9"/>
-    <p:sldId id="1628" r:id="rId10"/>
-    <p:sldId id="1613" r:id="rId11"/>
-    <p:sldId id="1631" r:id="rId12"/>
-    <p:sldId id="1632" r:id="rId13"/>
-    <p:sldId id="1634" r:id="rId14"/>
-    <p:sldId id="1633" r:id="rId15"/>
+    <p:sldId id="1642" r:id="rId10"/>
+    <p:sldId id="1628" r:id="rId11"/>
+    <p:sldId id="1645" r:id="rId12"/>
+    <p:sldId id="1613" r:id="rId13"/>
+    <p:sldId id="1631" r:id="rId14"/>
+    <p:sldId id="1632" r:id="rId15"/>
+    <p:sldId id="1634" r:id="rId16"/>
+    <p:sldId id="1641" r:id="rId17"/>
+    <p:sldId id="1643" r:id="rId18"/>
+    <p:sldId id="1644" r:id="rId19"/>
+    <p:sldId id="1633" r:id="rId20"/>
+    <p:sldId id="1638" r:id="rId21"/>
+    <p:sldId id="1639" r:id="rId22"/>
+    <p:sldId id="1635" r:id="rId23"/>
+    <p:sldId id="1640" r:id="rId24"/>
+    <p:sldId id="1636" r:id="rId25"/>
+    <p:sldId id="1637" r:id="rId26"/>
   </p:sldIdLst>
   <p:sldSz cx="12192000" cy="6858000"/>
   <p:notesSz cx="6858000" cy="9144000"/>
@@ -133,12 +144,23 @@
             <p14:sldId id="1582"/>
             <p14:sldId id="1583"/>
             <p14:sldId id="1591"/>
+            <p14:sldId id="1642"/>
             <p14:sldId id="1628"/>
+            <p14:sldId id="1645"/>
             <p14:sldId id="1613"/>
             <p14:sldId id="1631"/>
             <p14:sldId id="1632"/>
             <p14:sldId id="1634"/>
+            <p14:sldId id="1641"/>
+            <p14:sldId id="1643"/>
+            <p14:sldId id="1644"/>
             <p14:sldId id="1633"/>
+            <p14:sldId id="1638"/>
+            <p14:sldId id="1639"/>
+            <p14:sldId id="1635"/>
+            <p14:sldId id="1640"/>
+            <p14:sldId id="1636"/>
+            <p14:sldId id="1637"/>
           </p14:sldIdLst>
         </p14:section>
       </p14:sectionLst>
@@ -3368,7 +3390,7 @@
           <a:p>
             <a:fld id="{2915196C-CDBC-4DEE-A220-849C85FC22AC}" type="datetimeFigureOut">
               <a:rPr lang="he-IL" smtClean="0"/>
-              <a:t>י"ט/אדר/תשפ"ו</a:t>
+              <a:t>כ"ב/אדר/תשפ"ו</a:t>
             </a:fld>
             <a:endParaRPr lang="he-IL"/>
           </a:p>
@@ -4112,7 +4134,7 @@
           <a:p>
             <a:fld id="{7F6CD5E7-A5BE-4430-AD67-E129D63AAC5C}" type="slidenum">
               <a:rPr lang="he-IL" smtClean="0"/>
-              <a:t>10</a:t>
+              <a:t>12</a:t>
             </a:fld>
             <a:endParaRPr lang="he-IL"/>
           </a:p>
@@ -4317,7 +4339,7 @@
           <a:p>
             <a:fld id="{FC6B3A86-AB79-4388-8CA5-9FC4B834779B}" type="datetime8">
               <a:rPr lang="he-IL" smtClean="0"/>
-              <a:t>08 מרץ 26</a:t>
+              <a:t>11 מרץ 26</a:t>
             </a:fld>
             <a:endParaRPr lang="he-IL"/>
           </a:p>
@@ -4540,7 +4562,7 @@
           <a:p>
             <a:fld id="{18F56BC8-8E7D-4896-9980-77BC87FB8E3E}" type="datetime8">
               <a:rPr lang="he-IL" smtClean="0"/>
-              <a:t>08 מרץ 26</a:t>
+              <a:t>11 מרץ 26</a:t>
             </a:fld>
             <a:endParaRPr lang="he-IL"/>
           </a:p>
@@ -4773,7 +4795,7 @@
           <a:p>
             <a:fld id="{0FE327C8-CB36-417E-834B-544633ADCE63}" type="datetime8">
               <a:rPr lang="he-IL" smtClean="0"/>
-              <a:t>08 מרץ 26</a:t>
+              <a:t>11 מרץ 26</a:t>
             </a:fld>
             <a:endParaRPr lang="he-IL"/>
           </a:p>
@@ -4891,7 +4913,7 @@
           <a:p>
             <a:fld id="{8E065D1C-C98B-44F5-AB2A-FEE3E85D0A94}" type="datetime8">
               <a:rPr lang="he-IL" smtClean="0"/>
-              <a:t>08 מרץ 26</a:t>
+              <a:t>11 מרץ 26</a:t>
             </a:fld>
             <a:endParaRPr lang="he-IL"/>
           </a:p>
@@ -5202,7 +5224,7 @@
           <a:p>
             <a:fld id="{7634CBFB-2532-48BA-BAE2-ADD925390740}" type="datetime8">
               <a:rPr lang="he-IL" smtClean="0"/>
-              <a:t>08 מרץ 26</a:t>
+              <a:t>11 מרץ 26</a:t>
             </a:fld>
             <a:endParaRPr lang="he-IL"/>
           </a:p>
@@ -5485,7 +5507,7 @@
           <a:p>
             <a:fld id="{8EAC1FDD-37C4-4A6B-BF31-779943CE32CF}" type="datetime8">
               <a:rPr lang="he-IL" smtClean="0"/>
-              <a:t>08 מרץ 26</a:t>
+              <a:t>11 מרץ 26</a:t>
             </a:fld>
             <a:endParaRPr lang="he-IL"/>
           </a:p>
@@ -5798,7 +5820,7 @@
           <a:p>
             <a:fld id="{C73C226C-A76A-4927-8F1D-1BD4AC033ABB}" type="datetime8">
               <a:rPr lang="he-IL" smtClean="0"/>
-              <a:t>08 מרץ 26</a:t>
+              <a:t>11 מרץ 26</a:t>
             </a:fld>
             <a:endParaRPr lang="he-IL"/>
           </a:p>
@@ -6301,7 +6323,7 @@
           <a:p>
             <a:fld id="{430DF2BF-D428-43E9-B36B-6DD16CF93579}" type="datetime8">
               <a:rPr lang="he-IL" smtClean="0"/>
-              <a:t>08 מרץ 26</a:t>
+              <a:t>11 מרץ 26</a:t>
             </a:fld>
             <a:endParaRPr lang="he-IL"/>
           </a:p>
@@ -6448,7 +6470,7 @@
           <a:p>
             <a:fld id="{390A9136-4922-4C74-B05C-12CD0951E601}" type="datetime8">
               <a:rPr lang="he-IL" smtClean="0"/>
-              <a:t>08 מרץ 26</a:t>
+              <a:t>11 מרץ 26</a:t>
             </a:fld>
             <a:endParaRPr lang="he-IL"/>
           </a:p>
@@ -6566,7 +6588,7 @@
           <a:p>
             <a:fld id="{C29F3CA8-2E63-412C-AA06-0D760EBE5965}" type="datetime8">
               <a:rPr lang="he-IL" smtClean="0"/>
-              <a:t>08 מרץ 26</a:t>
+              <a:t>11 מרץ 26</a:t>
             </a:fld>
             <a:endParaRPr lang="he-IL"/>
           </a:p>
@@ -6888,7 +6910,7 @@
           <a:p>
             <a:fld id="{7AC7B867-AA4A-4FF3-AD8B-0AD0F18EE595}" type="datetime8">
               <a:rPr lang="he-IL" smtClean="0"/>
-              <a:t>08 מרץ 26</a:t>
+              <a:t>11 מרץ 26</a:t>
             </a:fld>
             <a:endParaRPr lang="he-IL"/>
           </a:p>
@@ -7186,7 +7208,7 @@
           <a:p>
             <a:fld id="{F5E9EBD3-88E8-46DB-BD3B-F935B7013014}" type="datetime8">
               <a:rPr lang="he-IL" smtClean="0"/>
-              <a:t>08 מרץ 26</a:t>
+              <a:t>11 מרץ 26</a:t>
             </a:fld>
             <a:endParaRPr lang="he-IL"/>
           </a:p>
@@ -7470,7 +7492,7 @@
           <a:p>
             <a:fld id="{8E065D1C-C98B-44F5-AB2A-FEE3E85D0A94}" type="datetime8">
               <a:rPr lang="he-IL" smtClean="0"/>
-              <a:t>08 מרץ 26</a:t>
+              <a:t>11 מרץ 26</a:t>
             </a:fld>
             <a:endParaRPr lang="he-IL"/>
           </a:p>
@@ -8279,7 +8301,7 @@
                   <a:prstClr val="white"/>
                 </a:solidFill>
               </a:rPr>
-              <a:t>08.03.2026</a:t>
+              <a:t>11.03.2026</a:t>
             </a:r>
           </a:p>
           <a:p>
@@ -8591,6 +8613,390 @@
   <p:cSld>
     <p:spTree>
       <p:nvGrpSpPr>
+        <p:cNvPr id="1" name=""/>
+        <p:cNvGrpSpPr/>
+        <p:nvPr/>
+      </p:nvGrpSpPr>
+      <p:grpSpPr>
+        <a:xfrm>
+          <a:off x="0" y="0"/>
+          <a:ext cx="0" cy="0"/>
+          <a:chOff x="0" y="0"/>
+          <a:chExt cx="0" cy="0"/>
+        </a:xfrm>
+      </p:grpSpPr>
+      <p:sp>
+        <p:nvSpPr>
+          <p:cNvPr id="2" name="Title 1">
+            <a:extLst>
+              <a:ext uri="{FF2B5EF4-FFF2-40B4-BE49-F238E27FC236}">
+                <a16:creationId xmlns:a16="http://schemas.microsoft.com/office/drawing/2014/main" id="{E180CF04-DED3-2E08-8761-891A60FEF6EA}"/>
+              </a:ext>
+            </a:extLst>
+          </p:cNvPr>
+          <p:cNvSpPr>
+            <a:spLocks noGrp="1"/>
+          </p:cNvSpPr>
+          <p:nvPr>
+            <p:ph type="title"/>
+          </p:nvPr>
+        </p:nvSpPr>
+        <p:spPr/>
+        <p:txBody>
+          <a:bodyPr/>
+          <a:lstStyle/>
+          <a:p>
+            <a:r>
+              <a:rPr lang="en-US" dirty="0"/>
+              <a:t>Indicators: Key Score and Boost </a:t>
+            </a:r>
+            <a:endParaRPr lang="en-IL" dirty="0"/>
+          </a:p>
+        </p:txBody>
+      </p:sp>
+      <p:sp>
+        <p:nvSpPr>
+          <p:cNvPr id="3" name="Content Placeholder 2">
+            <a:extLst>
+              <a:ext uri="{FF2B5EF4-FFF2-40B4-BE49-F238E27FC236}">
+                <a16:creationId xmlns:a16="http://schemas.microsoft.com/office/drawing/2014/main" id="{61818744-AA3F-0C94-68C3-B98E69E97B93}"/>
+              </a:ext>
+            </a:extLst>
+          </p:cNvPr>
+          <p:cNvSpPr>
+            <a:spLocks noGrp="1"/>
+          </p:cNvSpPr>
+          <p:nvPr>
+            <p:ph idx="1"/>
+          </p:nvPr>
+        </p:nvSpPr>
+        <p:spPr>
+          <a:xfrm>
+            <a:off x="1243087" y="1825624"/>
+            <a:ext cx="10582656" cy="4879976"/>
+          </a:xfrm>
+        </p:spPr>
+        <p:txBody>
+          <a:bodyPr>
+            <a:normAutofit/>
+          </a:bodyPr>
+          <a:lstStyle/>
+          <a:p>
+            <a:r>
+              <a:rPr lang="en-GB" b="1" dirty="0"/>
+              <a:t>Key Score Sum: </a:t>
+            </a:r>
+            <a:r>
+              <a:rPr lang="en-GB" dirty="0"/>
+              <a:t>The sum of the all the per-topic </a:t>
+            </a:r>
+            <a:r>
+              <a:rPr lang="en-GB" dirty="0" err="1"/>
+              <a:t>tdidf</a:t>
+            </a:r>
+            <a:r>
+              <a:rPr lang="en-GB" dirty="0"/>
+              <a:t> score. How much the author is a leading participant in the topics.</a:t>
+            </a:r>
+          </a:p>
+          <a:p>
+            <a:r>
+              <a:rPr lang="en-GB" b="1" dirty="0">
+                <a:highlight>
+                  <a:srgbClr val="FFFF00"/>
+                </a:highlight>
+              </a:rPr>
+              <a:t>Key Score Dominance: </a:t>
+            </a:r>
+            <a:r>
+              <a:rPr lang="en-GB" dirty="0">
+                <a:highlight>
+                  <a:srgbClr val="FFFF00"/>
+                </a:highlight>
+              </a:rPr>
+              <a:t>Author’s</a:t>
+            </a:r>
+            <a:r>
+              <a:rPr lang="en-GB" b="1" dirty="0">
+                <a:highlight>
+                  <a:srgbClr val="FFFF00"/>
+                </a:highlight>
+              </a:rPr>
+              <a:t> </a:t>
+            </a:r>
+            <a:r>
+              <a:rPr lang="en-GB" dirty="0">
+                <a:highlight>
+                  <a:srgbClr val="FFFF00"/>
+                </a:highlight>
+              </a:rPr>
+              <a:t>max score in a topic, divided by total score across all topics. Higher values indicate the author is mostly a leading participate in specific(s) topic(s). (in process)</a:t>
+            </a:r>
+          </a:p>
+          <a:p>
+            <a:r>
+              <a:rPr lang="en-GB" b="1" dirty="0">
+                <a:highlight>
+                  <a:srgbClr val="FFFF00"/>
+                </a:highlight>
+              </a:rPr>
+              <a:t>Posting Dominance: </a:t>
+            </a:r>
+            <a:r>
+              <a:rPr lang="en-GB" dirty="0">
+                <a:highlight>
+                  <a:srgbClr val="FFFF00"/>
+                </a:highlight>
+              </a:rPr>
+              <a:t>Author’s max number of posts in a topic, divided by total number of posts across all topics. Higher values indicate the author is mostly a leading participate in specific(s) topic(s). (in process)</a:t>
+            </a:r>
+          </a:p>
+          <a:p>
+            <a:r>
+              <a:rPr lang="en-GB" b="1" dirty="0">
+                <a:highlight>
+                  <a:srgbClr val="FFFF00"/>
+                </a:highlight>
+              </a:rPr>
+              <a:t>Boost Score : </a:t>
+            </a:r>
+            <a:r>
+              <a:rPr lang="en-GB" dirty="0">
+                <a:highlight>
+                  <a:srgbClr val="FFFF00"/>
+                </a:highlight>
+              </a:rPr>
+              <a:t>A quantitative measure calculated as the cumulative burst weights associated with a user's activity, based on discussion volume increases occurring shortly after the user posts or contributes. (in process)</a:t>
+            </a:r>
+          </a:p>
+          <a:p>
+            <a:endParaRPr lang="en-GB" dirty="0">
+              <a:highlight>
+                <a:srgbClr val="FFFF00"/>
+              </a:highlight>
+            </a:endParaRPr>
+          </a:p>
+          <a:p>
+            <a:endParaRPr lang="en-GB" dirty="0">
+              <a:highlight>
+                <a:srgbClr val="FFFF00"/>
+              </a:highlight>
+            </a:endParaRPr>
+          </a:p>
+          <a:p>
+            <a:endParaRPr lang="en-GB" b="1" dirty="0">
+              <a:highlight>
+                <a:srgbClr val="FFFF00"/>
+              </a:highlight>
+            </a:endParaRPr>
+          </a:p>
+        </p:txBody>
+      </p:sp>
+      <p:sp>
+        <p:nvSpPr>
+          <p:cNvPr id="4" name="Slide Number Placeholder 3">
+            <a:extLst>
+              <a:ext uri="{FF2B5EF4-FFF2-40B4-BE49-F238E27FC236}">
+                <a16:creationId xmlns:a16="http://schemas.microsoft.com/office/drawing/2014/main" id="{B369E058-D5C2-C2B9-04B1-D7B341490D5D}"/>
+              </a:ext>
+            </a:extLst>
+          </p:cNvPr>
+          <p:cNvSpPr>
+            <a:spLocks noGrp="1"/>
+          </p:cNvSpPr>
+          <p:nvPr>
+            <p:ph type="sldNum" sz="quarter" idx="12"/>
+          </p:nvPr>
+        </p:nvSpPr>
+        <p:spPr/>
+        <p:txBody>
+          <a:bodyPr/>
+          <a:lstStyle/>
+          <a:p>
+            <a:fld id="{E6AB8EDD-9EF2-4633-A1C2-4D908C1019B4}" type="slidenum">
+              <a:rPr lang="he-IL" smtClean="0"/>
+              <a:t>10</a:t>
+            </a:fld>
+            <a:endParaRPr lang="he-IL"/>
+          </a:p>
+        </p:txBody>
+      </p:sp>
+    </p:spTree>
+    <p:extLst>
+      <p:ext uri="{BB962C8B-B14F-4D97-AF65-F5344CB8AC3E}">
+        <p14:creationId xmlns:p14="http://schemas.microsoft.com/office/powerpoint/2010/main" val="3277267947"/>
+      </p:ext>
+    </p:extLst>
+  </p:cSld>
+  <p:clrMapOvr>
+    <a:masterClrMapping/>
+  </p:clrMapOvr>
+</p:sld>
+</file>
+
+<file path=ppt/slides/slide11.xml><?xml version="1.0" encoding="utf-8"?>
+<p:sld xmlns:a="http://schemas.openxmlformats.org/drawingml/2006/main" xmlns:r="http://schemas.openxmlformats.org/officeDocument/2006/relationships" xmlns:p="http://schemas.openxmlformats.org/presentationml/2006/main">
+  <p:cSld>
+    <p:spTree>
+      <p:nvGrpSpPr>
+        <p:cNvPr id="1" name="">
+          <a:extLst>
+            <a:ext uri="{FF2B5EF4-FFF2-40B4-BE49-F238E27FC236}">
+              <a16:creationId xmlns:a16="http://schemas.microsoft.com/office/drawing/2014/main" id="{C2EA1D98-6E94-E899-1C0B-FDA97B875908}"/>
+            </a:ext>
+          </a:extLst>
+        </p:cNvPr>
+        <p:cNvGrpSpPr/>
+        <p:nvPr/>
+      </p:nvGrpSpPr>
+      <p:grpSpPr>
+        <a:xfrm>
+          <a:off x="0" y="0"/>
+          <a:ext cx="0" cy="0"/>
+          <a:chOff x="0" y="0"/>
+          <a:chExt cx="0" cy="0"/>
+        </a:xfrm>
+      </p:grpSpPr>
+      <p:sp>
+        <p:nvSpPr>
+          <p:cNvPr id="2" name="Title 1">
+            <a:extLst>
+              <a:ext uri="{FF2B5EF4-FFF2-40B4-BE49-F238E27FC236}">
+                <a16:creationId xmlns:a16="http://schemas.microsoft.com/office/drawing/2014/main" id="{D9124865-CBA5-0D08-16D7-D3F84C92B9EA}"/>
+              </a:ext>
+            </a:extLst>
+          </p:cNvPr>
+          <p:cNvSpPr>
+            <a:spLocks noGrp="1"/>
+          </p:cNvSpPr>
+          <p:nvPr>
+            <p:ph type="title"/>
+          </p:nvPr>
+        </p:nvSpPr>
+        <p:spPr>
+          <a:xfrm>
+            <a:off x="3072268" y="401637"/>
+            <a:ext cx="8753475" cy="1325563"/>
+          </a:xfrm>
+        </p:spPr>
+        <p:txBody>
+          <a:bodyPr anchor="ctr">
+            <a:normAutofit/>
+          </a:bodyPr>
+          <a:lstStyle/>
+          <a:p>
+            <a:r>
+              <a:rPr lang="en-US" dirty="0"/>
+              <a:t>Indicators: Information Gain</a:t>
+            </a:r>
+            <a:endParaRPr lang="en-IL" dirty="0"/>
+          </a:p>
+        </p:txBody>
+      </p:sp>
+      <p:pic>
+        <p:nvPicPr>
+          <p:cNvPr id="8" name="Content Placeholder 7">
+            <a:extLst>
+              <a:ext uri="{FF2B5EF4-FFF2-40B4-BE49-F238E27FC236}">
+                <a16:creationId xmlns:a16="http://schemas.microsoft.com/office/drawing/2014/main" id="{2DF960CE-3B99-FAA1-068C-9440CAB6353A}"/>
+              </a:ext>
+            </a:extLst>
+          </p:cNvPr>
+          <p:cNvPicPr>
+            <a:picLocks noGrp="1" noChangeAspect="1"/>
+          </p:cNvPicPr>
+          <p:nvPr>
+            <p:ph idx="1"/>
+          </p:nvPr>
+        </p:nvPicPr>
+        <p:blipFill>
+          <a:blip r:embed="rId2">
+            <a:extLst>
+              <a:ext uri="{28A0092B-C50C-407E-A947-70E740481C1C}">
+                <a14:useLocalDpi xmlns:a14="http://schemas.microsoft.com/office/drawing/2010/main" val="0"/>
+              </a:ext>
+            </a:extLst>
+          </a:blip>
+          <a:srcRect l="-2" r="3" b="10937"/>
+          <a:stretch>
+            <a:fillRect/>
+          </a:stretch>
+        </p:blipFill>
+        <p:spPr>
+          <a:xfrm>
+            <a:off x="1243087" y="1605618"/>
+            <a:ext cx="10582656" cy="4712679"/>
+          </a:xfrm>
+          <a:prstGeom prst="rect">
+            <a:avLst/>
+          </a:prstGeom>
+          <a:noFill/>
+        </p:spPr>
+      </p:pic>
+      <p:sp>
+        <p:nvSpPr>
+          <p:cNvPr id="4" name="Slide Number Placeholder 3">
+            <a:extLst>
+              <a:ext uri="{FF2B5EF4-FFF2-40B4-BE49-F238E27FC236}">
+                <a16:creationId xmlns:a16="http://schemas.microsoft.com/office/drawing/2014/main" id="{3F63A626-1E2D-FD03-BD04-F81EFB01FD04}"/>
+              </a:ext>
+            </a:extLst>
+          </p:cNvPr>
+          <p:cNvSpPr>
+            <a:spLocks noGrp="1"/>
+          </p:cNvSpPr>
+          <p:nvPr>
+            <p:ph type="sldNum" sz="quarter" idx="12"/>
+          </p:nvPr>
+        </p:nvSpPr>
+        <p:spPr>
+          <a:xfrm>
+            <a:off x="11728704" y="6464649"/>
+            <a:ext cx="452233" cy="365125"/>
+          </a:xfrm>
+        </p:spPr>
+        <p:txBody>
+          <a:bodyPr anchor="ctr">
+            <a:normAutofit/>
+          </a:bodyPr>
+          <a:lstStyle/>
+          <a:p>
+            <a:pPr>
+              <a:spcAft>
+                <a:spcPts val="600"/>
+              </a:spcAft>
+            </a:pPr>
+            <a:fld id="{E6AB8EDD-9EF2-4633-A1C2-4D908C1019B4}" type="slidenum">
+              <a:rPr lang="he-IL" smtClean="0"/>
+              <a:pPr>
+                <a:spcAft>
+                  <a:spcPts val="600"/>
+                </a:spcAft>
+              </a:pPr>
+              <a:t>11</a:t>
+            </a:fld>
+            <a:endParaRPr lang="he-IL"/>
+          </a:p>
+        </p:txBody>
+      </p:sp>
+    </p:spTree>
+    <p:extLst>
+      <p:ext uri="{BB962C8B-B14F-4D97-AF65-F5344CB8AC3E}">
+        <p14:creationId xmlns:p14="http://schemas.microsoft.com/office/powerpoint/2010/main" val="408575652"/>
+      </p:ext>
+    </p:extLst>
+  </p:cSld>
+  <p:clrMapOvr>
+    <a:masterClrMapping/>
+  </p:clrMapOvr>
+</p:sld>
+</file>
+
+<file path=ppt/slides/slide12.xml><?xml version="1.0" encoding="utf-8"?>
+<p:sld xmlns:a="http://schemas.openxmlformats.org/drawingml/2006/main" xmlns:r="http://schemas.openxmlformats.org/officeDocument/2006/relationships" xmlns:p="http://schemas.openxmlformats.org/presentationml/2006/main">
+  <p:cSld>
+    <p:spTree>
+      <p:nvGrpSpPr>
         <p:cNvPr id="1" name="">
           <a:extLst>
             <a:ext uri="{FF2B5EF4-FFF2-40B4-BE49-F238E27FC236}">
@@ -8668,7 +9074,7 @@
           <a:p>
             <a:fld id="{E6AB8EDD-9EF2-4633-A1C2-4D908C1019B4}" type="slidenum">
               <a:rPr lang="he-IL" smtClean="0"/>
-              <a:t>10</a:t>
+              <a:t>12</a:t>
             </a:fld>
             <a:endParaRPr lang="he-IL"/>
           </a:p>
@@ -9295,7 +9701,7 @@
 </p:sld>
 </file>
 
-<file path=ppt/slides/slide11.xml><?xml version="1.0" encoding="utf-8"?>
+<file path=ppt/slides/slide13.xml><?xml version="1.0" encoding="utf-8"?>
 <p:sld xmlns:a="http://schemas.openxmlformats.org/drawingml/2006/main" xmlns:r="http://schemas.openxmlformats.org/officeDocument/2006/relationships" xmlns:p="http://schemas.openxmlformats.org/presentationml/2006/main">
   <p:cSld>
     <p:spTree>
@@ -9489,7 +9895,7 @@
           <a:p>
             <a:fld id="{E6AB8EDD-9EF2-4633-A1C2-4D908C1019B4}" type="slidenum">
               <a:rPr lang="he-IL" smtClean="0"/>
-              <a:t>11</a:t>
+              <a:t>13</a:t>
             </a:fld>
             <a:endParaRPr lang="he-IL"/>
           </a:p>
@@ -9508,7 +9914,7 @@
 </p:sld>
 </file>
 
-<file path=ppt/slides/slide12.xml><?xml version="1.0" encoding="utf-8"?>
+<file path=ppt/slides/slide14.xml><?xml version="1.0" encoding="utf-8"?>
 <p:sld xmlns:a="http://schemas.openxmlformats.org/drawingml/2006/main" xmlns:r="http://schemas.openxmlformats.org/officeDocument/2006/relationships" xmlns:p="http://schemas.openxmlformats.org/presentationml/2006/main">
   <p:cSld>
     <p:spTree>
@@ -9627,7 +10033,7 @@
           <a:p>
             <a:fld id="{E6AB8EDD-9EF2-4633-A1C2-4D908C1019B4}" type="slidenum">
               <a:rPr lang="he-IL" smtClean="0"/>
-              <a:t>12</a:t>
+              <a:t>14</a:t>
             </a:fld>
             <a:endParaRPr lang="he-IL"/>
           </a:p>
@@ -9676,7 +10082,7 @@
 </p:sld>
 </file>
 
-<file path=ppt/slides/slide13.xml><?xml version="1.0" encoding="utf-8"?>
+<file path=ppt/slides/slide15.xml><?xml version="1.0" encoding="utf-8"?>
 <p:sld xmlns:a="http://schemas.openxmlformats.org/drawingml/2006/main" xmlns:r="http://schemas.openxmlformats.org/officeDocument/2006/relationships" xmlns:p="http://schemas.openxmlformats.org/presentationml/2006/main">
   <p:cSld>
     <p:spTree>
@@ -9721,8 +10127,12 @@
           <a:lstStyle/>
           <a:p>
             <a:r>
+              <a:rPr lang="en-US" dirty="0"/>
+              <a:t>Entities Reuse </a:t>
+            </a:r>
+            <a:r>
               <a:rPr lang="en-GB" dirty="0"/>
-              <a:t>Backbone Graph - Account Relations</a:t>
+              <a:t>- Account Relations</a:t>
             </a:r>
           </a:p>
         </p:txBody>
@@ -9982,7 +10392,7 @@
           <a:p>
             <a:fld id="{E6AB8EDD-9EF2-4633-A1C2-4D908C1019B4}" type="slidenum">
               <a:rPr lang="he-IL" smtClean="0"/>
-              <a:t>13</a:t>
+              <a:t>15</a:t>
             </a:fld>
             <a:endParaRPr lang="he-IL"/>
           </a:p>
@@ -10001,7 +10411,482 @@
 </p:sld>
 </file>
 
-<file path=ppt/slides/slide14.xml><?xml version="1.0" encoding="utf-8"?>
+<file path=ppt/slides/slide16.xml><?xml version="1.0" encoding="utf-8"?>
+<p:sld xmlns:a="http://schemas.openxmlformats.org/drawingml/2006/main" xmlns:r="http://schemas.openxmlformats.org/officeDocument/2006/relationships" xmlns:p="http://schemas.openxmlformats.org/presentationml/2006/main">
+  <p:cSld>
+    <p:spTree>
+      <p:nvGrpSpPr>
+        <p:cNvPr id="1" name="">
+          <a:extLst>
+            <a:ext uri="{FF2B5EF4-FFF2-40B4-BE49-F238E27FC236}">
+              <a16:creationId xmlns:a16="http://schemas.microsoft.com/office/drawing/2014/main" id="{AACA654A-9337-7B09-93CE-E2AEA754F5AF}"/>
+            </a:ext>
+          </a:extLst>
+        </p:cNvPr>
+        <p:cNvGrpSpPr/>
+        <p:nvPr/>
+      </p:nvGrpSpPr>
+      <p:grpSpPr>
+        <a:xfrm>
+          <a:off x="0" y="0"/>
+          <a:ext cx="0" cy="0"/>
+          <a:chOff x="0" y="0"/>
+          <a:chExt cx="0" cy="0"/>
+        </a:xfrm>
+      </p:grpSpPr>
+      <p:sp>
+        <p:nvSpPr>
+          <p:cNvPr id="2" name="Title 1">
+            <a:extLst>
+              <a:ext uri="{FF2B5EF4-FFF2-40B4-BE49-F238E27FC236}">
+                <a16:creationId xmlns:a16="http://schemas.microsoft.com/office/drawing/2014/main" id="{424604B0-0FDD-B577-4322-2AD7159808DA}"/>
+              </a:ext>
+            </a:extLst>
+          </p:cNvPr>
+          <p:cNvSpPr>
+            <a:spLocks noGrp="1"/>
+          </p:cNvSpPr>
+          <p:nvPr>
+            <p:ph type="title"/>
+          </p:nvPr>
+        </p:nvSpPr>
+        <p:spPr/>
+        <p:txBody>
+          <a:bodyPr>
+            <a:normAutofit/>
+          </a:bodyPr>
+          <a:lstStyle/>
+          <a:p>
+            <a:r>
+              <a:rPr lang="en-GB" dirty="0"/>
+              <a:t>Parameters: Topic Modelling</a:t>
+            </a:r>
+            <a:endParaRPr lang="en-IL" dirty="0"/>
+          </a:p>
+        </p:txBody>
+      </p:sp>
+      <p:sp>
+        <p:nvSpPr>
+          <p:cNvPr id="3" name="Content Placeholder 2">
+            <a:extLst>
+              <a:ext uri="{FF2B5EF4-FFF2-40B4-BE49-F238E27FC236}">
+                <a16:creationId xmlns:a16="http://schemas.microsoft.com/office/drawing/2014/main" id="{DCA63454-C2E2-198E-A93E-0B8AE9710D2E}"/>
+              </a:ext>
+            </a:extLst>
+          </p:cNvPr>
+          <p:cNvSpPr>
+            <a:spLocks noGrp="1"/>
+          </p:cNvSpPr>
+          <p:nvPr>
+            <p:ph idx="1"/>
+          </p:nvPr>
+        </p:nvSpPr>
+        <p:spPr>
+          <a:xfrm>
+            <a:off x="1243087" y="1825625"/>
+            <a:ext cx="10582656" cy="4630738"/>
+          </a:xfrm>
+        </p:spPr>
+        <p:txBody>
+          <a:bodyPr>
+            <a:normAutofit/>
+          </a:bodyPr>
+          <a:lstStyle/>
+          <a:p>
+            <a:r>
+              <a:rPr lang="en-GB" dirty="0"/>
+              <a:t>Topic modelling identifies </a:t>
+            </a:r>
+            <a:r>
+              <a:rPr lang="en-GB" b="1" dirty="0"/>
+              <a:t>main discussion themes</a:t>
+            </a:r>
+            <a:r>
+              <a:rPr lang="en-GB" dirty="0"/>
+              <a:t> in a collection of texts by grouping similar posts.</a:t>
+            </a:r>
+          </a:p>
+          <a:p>
+            <a:r>
+              <a:rPr lang="en-GB" dirty="0"/>
+              <a:t>In this project we use </a:t>
+            </a:r>
+            <a:r>
+              <a:rPr lang="en-GB" b="1" dirty="0" err="1"/>
+              <a:t>BERTopic</a:t>
+            </a:r>
+            <a:r>
+              <a:rPr lang="en-GB" dirty="0"/>
+              <a:t>, which groups posts using semantic text embeddings.</a:t>
+            </a:r>
+          </a:p>
+          <a:p>
+            <a:r>
+              <a:rPr lang="en-GB" dirty="0"/>
+              <a:t>The </a:t>
+            </a:r>
+            <a:r>
+              <a:rPr lang="en-GB" b="1" dirty="0"/>
+              <a:t>minimum topic size</a:t>
+            </a:r>
+            <a:r>
+              <a:rPr lang="en-GB" dirty="0"/>
+              <a:t> parameter defines the </a:t>
+            </a:r>
+            <a:r>
+              <a:rPr lang="en-GB" b="1" dirty="0"/>
+              <a:t>minimum number of posts required to create a topic</a:t>
+            </a:r>
+            <a:r>
+              <a:rPr lang="en-GB" dirty="0"/>
+              <a:t>. Small clusters\topics below this size are treated as outliers or merged with other topics.</a:t>
+            </a:r>
+          </a:p>
+        </p:txBody>
+      </p:sp>
+      <p:sp>
+        <p:nvSpPr>
+          <p:cNvPr id="4" name="Slide Number Placeholder 3">
+            <a:extLst>
+              <a:ext uri="{FF2B5EF4-FFF2-40B4-BE49-F238E27FC236}">
+                <a16:creationId xmlns:a16="http://schemas.microsoft.com/office/drawing/2014/main" id="{5421A468-D817-D4C5-469A-83831FE0DC1E}"/>
+              </a:ext>
+            </a:extLst>
+          </p:cNvPr>
+          <p:cNvSpPr>
+            <a:spLocks noGrp="1"/>
+          </p:cNvSpPr>
+          <p:nvPr>
+            <p:ph type="sldNum" sz="quarter" idx="12"/>
+          </p:nvPr>
+        </p:nvSpPr>
+        <p:spPr/>
+        <p:txBody>
+          <a:bodyPr/>
+          <a:lstStyle/>
+          <a:p>
+            <a:fld id="{E6AB8EDD-9EF2-4633-A1C2-4D908C1019B4}" type="slidenum">
+              <a:rPr lang="he-IL" smtClean="0"/>
+              <a:t>16</a:t>
+            </a:fld>
+            <a:endParaRPr lang="he-IL"/>
+          </a:p>
+        </p:txBody>
+      </p:sp>
+    </p:spTree>
+    <p:extLst>
+      <p:ext uri="{BB962C8B-B14F-4D97-AF65-F5344CB8AC3E}">
+        <p14:creationId xmlns:p14="http://schemas.microsoft.com/office/powerpoint/2010/main" val="2477160895"/>
+      </p:ext>
+    </p:extLst>
+  </p:cSld>
+  <p:clrMapOvr>
+    <a:masterClrMapping/>
+  </p:clrMapOvr>
+</p:sld>
+</file>
+
+<file path=ppt/slides/slide17.xml><?xml version="1.0" encoding="utf-8"?>
+<p:sld xmlns:a="http://schemas.openxmlformats.org/drawingml/2006/main" xmlns:r="http://schemas.openxmlformats.org/officeDocument/2006/relationships" xmlns:p="http://schemas.openxmlformats.org/presentationml/2006/main">
+  <p:cSld>
+    <p:spTree>
+      <p:nvGrpSpPr>
+        <p:cNvPr id="1" name="">
+          <a:extLst>
+            <a:ext uri="{FF2B5EF4-FFF2-40B4-BE49-F238E27FC236}">
+              <a16:creationId xmlns:a16="http://schemas.microsoft.com/office/drawing/2014/main" id="{0C92A77B-562C-65D8-B819-958402E0A4D0}"/>
+            </a:ext>
+          </a:extLst>
+        </p:cNvPr>
+        <p:cNvGrpSpPr/>
+        <p:nvPr/>
+      </p:nvGrpSpPr>
+      <p:grpSpPr>
+        <a:xfrm>
+          <a:off x="0" y="0"/>
+          <a:ext cx="0" cy="0"/>
+          <a:chOff x="0" y="0"/>
+          <a:chExt cx="0" cy="0"/>
+        </a:xfrm>
+      </p:grpSpPr>
+      <p:sp>
+        <p:nvSpPr>
+          <p:cNvPr id="2" name="Title 1">
+            <a:extLst>
+              <a:ext uri="{FF2B5EF4-FFF2-40B4-BE49-F238E27FC236}">
+                <a16:creationId xmlns:a16="http://schemas.microsoft.com/office/drawing/2014/main" id="{5DABBF74-160F-DAB5-F463-10210F07242B}"/>
+              </a:ext>
+            </a:extLst>
+          </p:cNvPr>
+          <p:cNvSpPr>
+            <a:spLocks noGrp="1"/>
+          </p:cNvSpPr>
+          <p:nvPr>
+            <p:ph type="title"/>
+          </p:nvPr>
+        </p:nvSpPr>
+        <p:spPr>
+          <a:xfrm>
+            <a:off x="3072268" y="401637"/>
+            <a:ext cx="8753475" cy="1325563"/>
+          </a:xfrm>
+        </p:spPr>
+        <p:txBody>
+          <a:bodyPr anchor="ctr">
+            <a:normAutofit/>
+          </a:bodyPr>
+          <a:lstStyle/>
+          <a:p>
+            <a:r>
+              <a:rPr lang="en-GB" dirty="0"/>
+              <a:t>Parameters: Topic Modelling</a:t>
+            </a:r>
+            <a:endParaRPr lang="en-IL" dirty="0"/>
+          </a:p>
+        </p:txBody>
+      </p:sp>
+      <p:pic>
+        <p:nvPicPr>
+          <p:cNvPr id="6" name="Picture 5">
+            <a:extLst>
+              <a:ext uri="{FF2B5EF4-FFF2-40B4-BE49-F238E27FC236}">
+                <a16:creationId xmlns:a16="http://schemas.microsoft.com/office/drawing/2014/main" id="{5D244BE9-C0AD-B6B0-040C-325308674F27}"/>
+              </a:ext>
+            </a:extLst>
+          </p:cNvPr>
+          <p:cNvPicPr>
+            <a:picLocks noChangeAspect="1"/>
+          </p:cNvPicPr>
+          <p:nvPr/>
+        </p:nvPicPr>
+        <p:blipFill>
+          <a:blip r:embed="rId2"/>
+          <a:srcRect b="33678"/>
+          <a:stretch>
+            <a:fillRect/>
+          </a:stretch>
+        </p:blipFill>
+        <p:spPr>
+          <a:xfrm>
+            <a:off x="1806135" y="1727200"/>
+            <a:ext cx="6987084" cy="4630738"/>
+          </a:xfrm>
+          <a:prstGeom prst="rect">
+            <a:avLst/>
+          </a:prstGeom>
+          <a:noFill/>
+        </p:spPr>
+      </p:pic>
+      <p:sp>
+        <p:nvSpPr>
+          <p:cNvPr id="4" name="Slide Number Placeholder 3">
+            <a:extLst>
+              <a:ext uri="{FF2B5EF4-FFF2-40B4-BE49-F238E27FC236}">
+                <a16:creationId xmlns:a16="http://schemas.microsoft.com/office/drawing/2014/main" id="{341E79C9-0EF6-3B44-4AA2-0BAFFE957FCA}"/>
+              </a:ext>
+            </a:extLst>
+          </p:cNvPr>
+          <p:cNvSpPr>
+            <a:spLocks noGrp="1"/>
+          </p:cNvSpPr>
+          <p:nvPr>
+            <p:ph type="sldNum" sz="quarter" idx="12"/>
+          </p:nvPr>
+        </p:nvSpPr>
+        <p:spPr>
+          <a:xfrm>
+            <a:off x="11728704" y="6464649"/>
+            <a:ext cx="452233" cy="365125"/>
+          </a:xfrm>
+        </p:spPr>
+        <p:txBody>
+          <a:bodyPr anchor="ctr">
+            <a:normAutofit/>
+          </a:bodyPr>
+          <a:lstStyle/>
+          <a:p>
+            <a:pPr>
+              <a:spcAft>
+                <a:spcPts val="600"/>
+              </a:spcAft>
+            </a:pPr>
+            <a:fld id="{E6AB8EDD-9EF2-4633-A1C2-4D908C1019B4}" type="slidenum">
+              <a:rPr lang="he-IL" smtClean="0"/>
+              <a:pPr>
+                <a:spcAft>
+                  <a:spcPts val="600"/>
+                </a:spcAft>
+              </a:pPr>
+              <a:t>17</a:t>
+            </a:fld>
+            <a:endParaRPr lang="he-IL"/>
+          </a:p>
+        </p:txBody>
+      </p:sp>
+    </p:spTree>
+    <p:extLst>
+      <p:ext uri="{BB962C8B-B14F-4D97-AF65-F5344CB8AC3E}">
+        <p14:creationId xmlns:p14="http://schemas.microsoft.com/office/powerpoint/2010/main" val="2707134796"/>
+      </p:ext>
+    </p:extLst>
+  </p:cSld>
+  <p:clrMapOvr>
+    <a:masterClrMapping/>
+  </p:clrMapOvr>
+</p:sld>
+</file>
+
+<file path=ppt/slides/slide18.xml><?xml version="1.0" encoding="utf-8"?>
+<p:sld xmlns:a="http://schemas.openxmlformats.org/drawingml/2006/main" xmlns:r="http://schemas.openxmlformats.org/officeDocument/2006/relationships" xmlns:p="http://schemas.openxmlformats.org/presentationml/2006/main">
+  <p:cSld>
+    <p:spTree>
+      <p:nvGrpSpPr>
+        <p:cNvPr id="1" name="">
+          <a:extLst>
+            <a:ext uri="{FF2B5EF4-FFF2-40B4-BE49-F238E27FC236}">
+              <a16:creationId xmlns:a16="http://schemas.microsoft.com/office/drawing/2014/main" id="{846F71F7-6FBD-9CFA-88D9-4C702218356B}"/>
+            </a:ext>
+          </a:extLst>
+        </p:cNvPr>
+        <p:cNvGrpSpPr/>
+        <p:nvPr/>
+      </p:nvGrpSpPr>
+      <p:grpSpPr>
+        <a:xfrm>
+          <a:off x="0" y="0"/>
+          <a:ext cx="0" cy="0"/>
+          <a:chOff x="0" y="0"/>
+          <a:chExt cx="0" cy="0"/>
+        </a:xfrm>
+      </p:grpSpPr>
+      <p:sp>
+        <p:nvSpPr>
+          <p:cNvPr id="2" name="Title 1">
+            <a:extLst>
+              <a:ext uri="{FF2B5EF4-FFF2-40B4-BE49-F238E27FC236}">
+                <a16:creationId xmlns:a16="http://schemas.microsoft.com/office/drawing/2014/main" id="{80D8AB6B-A5A4-337A-1C5F-CDB826531371}"/>
+              </a:ext>
+            </a:extLst>
+          </p:cNvPr>
+          <p:cNvSpPr>
+            <a:spLocks noGrp="1"/>
+          </p:cNvSpPr>
+          <p:nvPr>
+            <p:ph type="title"/>
+          </p:nvPr>
+        </p:nvSpPr>
+        <p:spPr>
+          <a:xfrm>
+            <a:off x="3072268" y="401637"/>
+            <a:ext cx="8753475" cy="1325563"/>
+          </a:xfrm>
+        </p:spPr>
+        <p:txBody>
+          <a:bodyPr anchor="ctr">
+            <a:normAutofit/>
+          </a:bodyPr>
+          <a:lstStyle/>
+          <a:p>
+            <a:r>
+              <a:rPr lang="en-GB" dirty="0"/>
+              <a:t>Parameters: Topic Modelling</a:t>
+            </a:r>
+            <a:endParaRPr lang="en-IL" dirty="0"/>
+          </a:p>
+        </p:txBody>
+      </p:sp>
+      <p:pic>
+        <p:nvPicPr>
+          <p:cNvPr id="6" name="Picture 5">
+            <a:extLst>
+              <a:ext uri="{FF2B5EF4-FFF2-40B4-BE49-F238E27FC236}">
+                <a16:creationId xmlns:a16="http://schemas.microsoft.com/office/drawing/2014/main" id="{CEFE3827-EBB8-7438-636B-2503A7DA5854}"/>
+              </a:ext>
+            </a:extLst>
+          </p:cNvPr>
+          <p:cNvPicPr>
+            <a:picLocks noChangeAspect="1"/>
+          </p:cNvPicPr>
+          <p:nvPr/>
+        </p:nvPicPr>
+        <p:blipFill>
+          <a:blip r:embed="rId2"/>
+          <a:srcRect t="66739" b="78"/>
+          <a:stretch>
+            <a:fillRect/>
+          </a:stretch>
+        </p:blipFill>
+        <p:spPr>
+          <a:xfrm>
+            <a:off x="1854032" y="2213811"/>
+            <a:ext cx="8483935" cy="2813297"/>
+          </a:xfrm>
+          <a:prstGeom prst="rect">
+            <a:avLst/>
+          </a:prstGeom>
+          <a:noFill/>
+        </p:spPr>
+      </p:pic>
+      <p:sp>
+        <p:nvSpPr>
+          <p:cNvPr id="4" name="Slide Number Placeholder 3">
+            <a:extLst>
+              <a:ext uri="{FF2B5EF4-FFF2-40B4-BE49-F238E27FC236}">
+                <a16:creationId xmlns:a16="http://schemas.microsoft.com/office/drawing/2014/main" id="{3C70E3BD-7020-DD16-6FE1-065936207B34}"/>
+              </a:ext>
+            </a:extLst>
+          </p:cNvPr>
+          <p:cNvSpPr>
+            <a:spLocks noGrp="1"/>
+          </p:cNvSpPr>
+          <p:nvPr>
+            <p:ph type="sldNum" sz="quarter" idx="12"/>
+          </p:nvPr>
+        </p:nvSpPr>
+        <p:spPr>
+          <a:xfrm>
+            <a:off x="11728704" y="6464649"/>
+            <a:ext cx="452233" cy="365125"/>
+          </a:xfrm>
+        </p:spPr>
+        <p:txBody>
+          <a:bodyPr anchor="ctr">
+            <a:normAutofit/>
+          </a:bodyPr>
+          <a:lstStyle/>
+          <a:p>
+            <a:pPr>
+              <a:spcAft>
+                <a:spcPts val="600"/>
+              </a:spcAft>
+            </a:pPr>
+            <a:fld id="{E6AB8EDD-9EF2-4633-A1C2-4D908C1019B4}" type="slidenum">
+              <a:rPr lang="he-IL" smtClean="0"/>
+              <a:pPr>
+                <a:spcAft>
+                  <a:spcPts val="600"/>
+                </a:spcAft>
+              </a:pPr>
+              <a:t>18</a:t>
+            </a:fld>
+            <a:endParaRPr lang="he-IL"/>
+          </a:p>
+        </p:txBody>
+      </p:sp>
+    </p:spTree>
+    <p:extLst>
+      <p:ext uri="{BB962C8B-B14F-4D97-AF65-F5344CB8AC3E}">
+        <p14:creationId xmlns:p14="http://schemas.microsoft.com/office/powerpoint/2010/main" val="1712839179"/>
+      </p:ext>
+    </p:extLst>
+  </p:cSld>
+  <p:clrMapOvr>
+    <a:masterClrMapping/>
+  </p:clrMapOvr>
+</p:sld>
+</file>
+
+<file path=ppt/slides/slide19.xml><?xml version="1.0" encoding="utf-8"?>
 <p:sld xmlns:a="http://schemas.openxmlformats.org/drawingml/2006/main" xmlns:r="http://schemas.openxmlformats.org/officeDocument/2006/relationships" xmlns:p="http://schemas.openxmlformats.org/presentationml/2006/main">
   <p:cSld>
     <p:spTree>
@@ -10036,11 +10921,20 @@
         </p:nvSpPr>
         <p:spPr/>
         <p:txBody>
-          <a:bodyPr/>
+          <a:bodyPr>
+            <a:normAutofit fontScale="90000"/>
+          </a:bodyPr>
           <a:lstStyle/>
           <a:p>
-            <a:r>
+            <a:br>
               <a:rPr lang="en-GB" dirty="0"/>
+            </a:br>
+            <a:r>
+              <a:rPr lang="en-GB" dirty="0"/>
+              <a:t>Parameters: </a:t>
+            </a:r>
+            <a:r>
+              <a:rPr lang="en-GB" sz="4900" dirty="0"/>
               <a:t>Key Authors Mode</a:t>
             </a:r>
             <a:br>
@@ -10444,7 +11338,7 @@
           <a:p>
             <a:fld id="{E6AB8EDD-9EF2-4633-A1C2-4D908C1019B4}" type="slidenum">
               <a:rPr lang="he-IL" smtClean="0"/>
-              <a:t>14</a:t>
+              <a:t>19</a:t>
             </a:fld>
             <a:endParaRPr lang="he-IL"/>
           </a:p>
@@ -10603,6 +11497,1133 @@
     <p:extLst>
       <p:ext uri="{BB962C8B-B14F-4D97-AF65-F5344CB8AC3E}">
         <p14:creationId xmlns:p14="http://schemas.microsoft.com/office/powerpoint/2010/main" val="2564283967"/>
+      </p:ext>
+    </p:extLst>
+  </p:cSld>
+  <p:clrMapOvr>
+    <a:masterClrMapping/>
+  </p:clrMapOvr>
+</p:sld>
+</file>
+
+<file path=ppt/slides/slide20.xml><?xml version="1.0" encoding="utf-8"?>
+<p:sld xmlns:a="http://schemas.openxmlformats.org/drawingml/2006/main" xmlns:r="http://schemas.openxmlformats.org/officeDocument/2006/relationships" xmlns:p="http://schemas.openxmlformats.org/presentationml/2006/main">
+  <p:cSld>
+    <p:spTree>
+      <p:nvGrpSpPr>
+        <p:cNvPr id="1" name="">
+          <a:extLst>
+            <a:ext uri="{FF2B5EF4-FFF2-40B4-BE49-F238E27FC236}">
+              <a16:creationId xmlns:a16="http://schemas.microsoft.com/office/drawing/2014/main" id="{2D3A45DF-0427-8596-3589-6E6F87AEAF53}"/>
+            </a:ext>
+          </a:extLst>
+        </p:cNvPr>
+        <p:cNvGrpSpPr/>
+        <p:nvPr/>
+      </p:nvGrpSpPr>
+      <p:grpSpPr>
+        <a:xfrm>
+          <a:off x="0" y="0"/>
+          <a:ext cx="0" cy="0"/>
+          <a:chOff x="0" y="0"/>
+          <a:chExt cx="0" cy="0"/>
+        </a:xfrm>
+      </p:grpSpPr>
+      <p:sp>
+        <p:nvSpPr>
+          <p:cNvPr id="2" name="Title 1">
+            <a:extLst>
+              <a:ext uri="{FF2B5EF4-FFF2-40B4-BE49-F238E27FC236}">
+                <a16:creationId xmlns:a16="http://schemas.microsoft.com/office/drawing/2014/main" id="{1842B29E-3C29-2BA6-0A31-8AB0C38457F3}"/>
+              </a:ext>
+            </a:extLst>
+          </p:cNvPr>
+          <p:cNvSpPr>
+            <a:spLocks noGrp="1"/>
+          </p:cNvSpPr>
+          <p:nvPr>
+            <p:ph type="title"/>
+          </p:nvPr>
+        </p:nvSpPr>
+        <p:spPr/>
+        <p:txBody>
+          <a:bodyPr>
+            <a:normAutofit/>
+          </a:bodyPr>
+          <a:lstStyle/>
+          <a:p>
+            <a:r>
+              <a:rPr lang="en-GB" dirty="0"/>
+              <a:t>Parameters: Directed and Undirected Graphs</a:t>
+            </a:r>
+            <a:endParaRPr lang="en-IL" dirty="0"/>
+          </a:p>
+        </p:txBody>
+      </p:sp>
+      <p:sp>
+        <p:nvSpPr>
+          <p:cNvPr id="3" name="Content Placeholder 2">
+            <a:extLst>
+              <a:ext uri="{FF2B5EF4-FFF2-40B4-BE49-F238E27FC236}">
+                <a16:creationId xmlns:a16="http://schemas.microsoft.com/office/drawing/2014/main" id="{64165231-0FF9-BBBA-8EBF-94408B79DA77}"/>
+              </a:ext>
+            </a:extLst>
+          </p:cNvPr>
+          <p:cNvSpPr>
+            <a:spLocks noGrp="1"/>
+          </p:cNvSpPr>
+          <p:nvPr>
+            <p:ph idx="1"/>
+          </p:nvPr>
+        </p:nvSpPr>
+        <p:spPr>
+          <a:xfrm>
+            <a:off x="1243087" y="1825625"/>
+            <a:ext cx="10582656" cy="4630738"/>
+          </a:xfrm>
+        </p:spPr>
+        <p:txBody>
+          <a:bodyPr>
+            <a:normAutofit/>
+          </a:bodyPr>
+          <a:lstStyle/>
+          <a:p>
+            <a:r>
+              <a:rPr lang="en-GB" dirty="0"/>
+              <a:t>A </a:t>
+            </a:r>
+            <a:r>
+              <a:rPr lang="en-GB" b="1" dirty="0"/>
+              <a:t>graph</a:t>
+            </a:r>
+            <a:r>
+              <a:rPr lang="en-GB" dirty="0"/>
+              <a:t> is a structure used to represent relationships between entities. It consists of </a:t>
+            </a:r>
+            <a:r>
+              <a:rPr lang="en-GB" b="1" dirty="0"/>
+              <a:t>nodes</a:t>
+            </a:r>
+            <a:r>
+              <a:rPr lang="en-GB" dirty="0"/>
+              <a:t> (e.g., social media accounts) and </a:t>
+            </a:r>
+            <a:r>
+              <a:rPr lang="en-GB" b="1" dirty="0"/>
+              <a:t>edges</a:t>
+            </a:r>
+            <a:r>
+              <a:rPr lang="en-GB" dirty="0"/>
+              <a:t> that represent connections between them.</a:t>
+            </a:r>
+            <a:endParaRPr lang="en-US" sz="2000" i="1" dirty="0"/>
+          </a:p>
+          <a:p>
+            <a:r>
+              <a:rPr lang="en-GB" b="1" dirty="0"/>
+              <a:t>Directed Graph. </a:t>
+            </a:r>
+            <a:r>
+              <a:rPr lang="en-GB" dirty="0"/>
+              <a:t>In a directed graph, edges have a </a:t>
+            </a:r>
+            <a:r>
+              <a:rPr lang="en-GB" b="1" dirty="0"/>
+              <a:t>direction</a:t>
+            </a:r>
+            <a:r>
+              <a:rPr lang="en-GB" dirty="0"/>
+              <a:t> (A → B). This means the relationship goes from one node to another.</a:t>
+            </a:r>
+            <a:br>
+              <a:rPr lang="en-GB" dirty="0"/>
+            </a:br>
+            <a:r>
+              <a:rPr lang="en-GB" i="1" dirty="0"/>
+              <a:t>In this project</a:t>
+            </a:r>
+            <a:r>
+              <a:rPr lang="en-GB" dirty="0"/>
+              <a:t>, directed graphs represent </a:t>
+            </a:r>
+            <a:r>
+              <a:rPr lang="en-GB" b="1" dirty="0"/>
+              <a:t>information flow</a:t>
+            </a:r>
+            <a:r>
+              <a:rPr lang="en-GB" dirty="0"/>
+              <a:t>, such as when one account shares content from another account or use entity that was used by the other account.</a:t>
+            </a:r>
+          </a:p>
+          <a:p>
+            <a:r>
+              <a:rPr lang="en-GB" b="1" dirty="0"/>
+              <a:t>Undirected Graph. </a:t>
+            </a:r>
+            <a:r>
+              <a:rPr lang="en-GB" dirty="0"/>
+              <a:t>In an undirected graph, edges </a:t>
+            </a:r>
+            <a:r>
+              <a:rPr lang="en-GB" b="1" dirty="0"/>
+              <a:t>have no direction</a:t>
+            </a:r>
+            <a:r>
+              <a:rPr lang="en-GB" dirty="0"/>
+              <a:t> (A — B). The connection simply shows that two nodes are related.</a:t>
+            </a:r>
+            <a:br>
+              <a:rPr lang="en-GB" dirty="0"/>
+            </a:br>
+            <a:r>
+              <a:rPr lang="en-GB" dirty="0"/>
+              <a:t>In this project, undirected graphs represent </a:t>
+            </a:r>
+            <a:r>
+              <a:rPr lang="en-GB" b="1" dirty="0"/>
+              <a:t>coordination</a:t>
+            </a:r>
+            <a:r>
+              <a:rPr lang="en-GB" dirty="0"/>
+              <a:t>, for example when two accounts use the same entity (e.g., hashtags), without considering the timing of their actions.</a:t>
+            </a:r>
+          </a:p>
+        </p:txBody>
+      </p:sp>
+      <p:sp>
+        <p:nvSpPr>
+          <p:cNvPr id="4" name="Slide Number Placeholder 3">
+            <a:extLst>
+              <a:ext uri="{FF2B5EF4-FFF2-40B4-BE49-F238E27FC236}">
+                <a16:creationId xmlns:a16="http://schemas.microsoft.com/office/drawing/2014/main" id="{14C73A4E-18AA-8189-C2E9-1F20BF7F6BFB}"/>
+              </a:ext>
+            </a:extLst>
+          </p:cNvPr>
+          <p:cNvSpPr>
+            <a:spLocks noGrp="1"/>
+          </p:cNvSpPr>
+          <p:nvPr>
+            <p:ph type="sldNum" sz="quarter" idx="12"/>
+          </p:nvPr>
+        </p:nvSpPr>
+        <p:spPr/>
+        <p:txBody>
+          <a:bodyPr/>
+          <a:lstStyle/>
+          <a:p>
+            <a:fld id="{E6AB8EDD-9EF2-4633-A1C2-4D908C1019B4}" type="slidenum">
+              <a:rPr lang="he-IL" smtClean="0"/>
+              <a:t>20</a:t>
+            </a:fld>
+            <a:endParaRPr lang="he-IL"/>
+          </a:p>
+        </p:txBody>
+      </p:sp>
+    </p:spTree>
+    <p:extLst>
+      <p:ext uri="{BB962C8B-B14F-4D97-AF65-F5344CB8AC3E}">
+        <p14:creationId xmlns:p14="http://schemas.microsoft.com/office/powerpoint/2010/main" val="2114665478"/>
+      </p:ext>
+    </p:extLst>
+  </p:cSld>
+  <p:clrMapOvr>
+    <a:masterClrMapping/>
+  </p:clrMapOvr>
+</p:sld>
+</file>
+
+<file path=ppt/slides/slide21.xml><?xml version="1.0" encoding="utf-8"?>
+<p:sld xmlns:a="http://schemas.openxmlformats.org/drawingml/2006/main" xmlns:r="http://schemas.openxmlformats.org/officeDocument/2006/relationships" xmlns:p="http://schemas.openxmlformats.org/presentationml/2006/main">
+  <p:cSld>
+    <p:spTree>
+      <p:nvGrpSpPr>
+        <p:cNvPr id="1" name="">
+          <a:extLst>
+            <a:ext uri="{FF2B5EF4-FFF2-40B4-BE49-F238E27FC236}">
+              <a16:creationId xmlns:a16="http://schemas.microsoft.com/office/drawing/2014/main" id="{50AC93FC-57F5-5AA3-2276-E4F871CC0659}"/>
+            </a:ext>
+          </a:extLst>
+        </p:cNvPr>
+        <p:cNvGrpSpPr/>
+        <p:nvPr/>
+      </p:nvGrpSpPr>
+      <p:grpSpPr>
+        <a:xfrm>
+          <a:off x="0" y="0"/>
+          <a:ext cx="0" cy="0"/>
+          <a:chOff x="0" y="0"/>
+          <a:chExt cx="0" cy="0"/>
+        </a:xfrm>
+      </p:grpSpPr>
+      <p:sp>
+        <p:nvSpPr>
+          <p:cNvPr id="2" name="Title 1">
+            <a:extLst>
+              <a:ext uri="{FF2B5EF4-FFF2-40B4-BE49-F238E27FC236}">
+                <a16:creationId xmlns:a16="http://schemas.microsoft.com/office/drawing/2014/main" id="{2EF5BC04-45F5-332F-E569-CBBA8A33B234}"/>
+              </a:ext>
+            </a:extLst>
+          </p:cNvPr>
+          <p:cNvSpPr>
+            <a:spLocks noGrp="1"/>
+          </p:cNvSpPr>
+          <p:nvPr>
+            <p:ph type="title"/>
+          </p:nvPr>
+        </p:nvSpPr>
+        <p:spPr/>
+        <p:txBody>
+          <a:bodyPr>
+            <a:normAutofit/>
+          </a:bodyPr>
+          <a:lstStyle/>
+          <a:p>
+            <a:r>
+              <a:rPr lang="en-GB" dirty="0"/>
+              <a:t>Parameters: Directed and Undirected Graphs</a:t>
+            </a:r>
+            <a:endParaRPr lang="en-IL" dirty="0"/>
+          </a:p>
+        </p:txBody>
+      </p:sp>
+      <p:sp>
+        <p:nvSpPr>
+          <p:cNvPr id="4" name="Slide Number Placeholder 3">
+            <a:extLst>
+              <a:ext uri="{FF2B5EF4-FFF2-40B4-BE49-F238E27FC236}">
+                <a16:creationId xmlns:a16="http://schemas.microsoft.com/office/drawing/2014/main" id="{E7A8DEFF-6819-FE57-57E3-0337F0558AD3}"/>
+              </a:ext>
+            </a:extLst>
+          </p:cNvPr>
+          <p:cNvSpPr>
+            <a:spLocks noGrp="1"/>
+          </p:cNvSpPr>
+          <p:nvPr>
+            <p:ph type="sldNum" sz="quarter" idx="12"/>
+          </p:nvPr>
+        </p:nvSpPr>
+        <p:spPr/>
+        <p:txBody>
+          <a:bodyPr/>
+          <a:lstStyle/>
+          <a:p>
+            <a:fld id="{E6AB8EDD-9EF2-4633-A1C2-4D908C1019B4}" type="slidenum">
+              <a:rPr lang="he-IL" smtClean="0"/>
+              <a:t>21</a:t>
+            </a:fld>
+            <a:endParaRPr lang="he-IL"/>
+          </a:p>
+        </p:txBody>
+      </p:sp>
+      <p:sp>
+        <p:nvSpPr>
+          <p:cNvPr id="5" name="AutoShape 2" descr="directed_graph">
+            <a:extLst>
+              <a:ext uri="{FF2B5EF4-FFF2-40B4-BE49-F238E27FC236}">
+                <a16:creationId xmlns:a16="http://schemas.microsoft.com/office/drawing/2014/main" id="{7FCF6CC6-D2CB-E2A3-D82C-7F0E456B4CCB}"/>
+              </a:ext>
+            </a:extLst>
+          </p:cNvPr>
+          <p:cNvSpPr>
+            <a:spLocks noChangeAspect="1" noChangeArrowheads="1"/>
+          </p:cNvSpPr>
+          <p:nvPr/>
+        </p:nvSpPr>
+        <p:spPr bwMode="auto">
+          <a:xfrm>
+            <a:off x="5943600" y="3276600"/>
+            <a:ext cx="304800" cy="304800"/>
+          </a:xfrm>
+          <a:prstGeom prst="rect">
+            <a:avLst/>
+          </a:prstGeom>
+          <a:noFill/>
+          <a:extLst>
+            <a:ext uri="{909E8E84-426E-40DD-AFC4-6F175D3DCCD1}">
+              <a14:hiddenFill xmlns:a14="http://schemas.microsoft.com/office/drawing/2010/main">
+                <a:solidFill>
+                  <a:srgbClr val="FFFFFF"/>
+                </a:solidFill>
+              </a14:hiddenFill>
+            </a:ext>
+          </a:extLst>
+        </p:spPr>
+        <p:txBody>
+          <a:bodyPr vert="horz" wrap="square" lIns="91440" tIns="45720" rIns="91440" bIns="45720" numCol="1" anchor="t" anchorCtr="0" compatLnSpc="1">
+            <a:prstTxWarp prst="textNoShape">
+              <a:avLst/>
+            </a:prstTxWarp>
+          </a:bodyPr>
+          <a:lstStyle/>
+          <a:p>
+            <a:endParaRPr lang="en-IL"/>
+          </a:p>
+        </p:txBody>
+      </p:sp>
+      <p:pic>
+        <p:nvPicPr>
+          <p:cNvPr id="9" name="Content Placeholder 8">
+            <a:extLst>
+              <a:ext uri="{FF2B5EF4-FFF2-40B4-BE49-F238E27FC236}">
+                <a16:creationId xmlns:a16="http://schemas.microsoft.com/office/drawing/2014/main" id="{97720AA1-12B7-38F3-0F66-BD7E66B0A74E}"/>
+              </a:ext>
+            </a:extLst>
+          </p:cNvPr>
+          <p:cNvPicPr>
+            <a:picLocks noGrp="1" noChangeAspect="1"/>
+          </p:cNvPicPr>
+          <p:nvPr>
+            <p:ph idx="1"/>
+          </p:nvPr>
+        </p:nvPicPr>
+        <p:blipFill>
+          <a:blip r:embed="rId2">
+            <a:extLst>
+              <a:ext uri="{28A0092B-C50C-407E-A947-70E740481C1C}">
+                <a14:useLocalDpi xmlns:a14="http://schemas.microsoft.com/office/drawing/2010/main" val="0"/>
+              </a:ext>
+            </a:extLst>
+          </a:blip>
+          <a:stretch>
+            <a:fillRect/>
+          </a:stretch>
+        </p:blipFill>
+        <p:spPr bwMode="auto">
+          <a:xfrm>
+            <a:off x="1353284" y="1635475"/>
+            <a:ext cx="9485431" cy="4185447"/>
+          </a:xfrm>
+          <a:prstGeom prst="rect">
+            <a:avLst/>
+          </a:prstGeom>
+          <a:noFill/>
+          <a:extLst>
+            <a:ext uri="{909E8E84-426E-40DD-AFC4-6F175D3DCCD1}">
+              <a14:hiddenFill xmlns:a14="http://schemas.microsoft.com/office/drawing/2010/main">
+                <a:solidFill>
+                  <a:srgbClr val="FFFFFF"/>
+                </a:solidFill>
+              </a14:hiddenFill>
+            </a:ext>
+          </a:extLst>
+        </p:spPr>
+      </p:pic>
+      <p:sp>
+        <p:nvSpPr>
+          <p:cNvPr id="11" name="TextBox 10">
+            <a:extLst>
+              <a:ext uri="{FF2B5EF4-FFF2-40B4-BE49-F238E27FC236}">
+                <a16:creationId xmlns:a16="http://schemas.microsoft.com/office/drawing/2014/main" id="{2EB530D7-704D-72DC-ED6A-0E9601FA672F}"/>
+              </a:ext>
+            </a:extLst>
+          </p:cNvPr>
+          <p:cNvSpPr txBox="1"/>
+          <p:nvPr/>
+        </p:nvSpPr>
+        <p:spPr>
+          <a:xfrm>
+            <a:off x="1353284" y="5820922"/>
+            <a:ext cx="9485431" cy="307777"/>
+          </a:xfrm>
+          <a:prstGeom prst="rect">
+            <a:avLst/>
+          </a:prstGeom>
+          <a:noFill/>
+        </p:spPr>
+        <p:txBody>
+          <a:bodyPr wrap="square">
+            <a:spAutoFit/>
+          </a:bodyPr>
+          <a:lstStyle/>
+          <a:p>
+            <a:r>
+              <a:rPr lang="en-US" sz="1400" dirty="0"/>
+              <a:t>Source: </a:t>
+            </a:r>
+            <a:r>
+              <a:rPr lang="en-US" sz="1400" dirty="0">
+                <a:hlinkClick r:id="rId3"/>
+              </a:rPr>
+              <a:t>Geeks For Geeks</a:t>
+            </a:r>
+            <a:endParaRPr lang="en-IL" sz="1400" dirty="0"/>
+          </a:p>
+        </p:txBody>
+      </p:sp>
+    </p:spTree>
+    <p:extLst>
+      <p:ext uri="{BB962C8B-B14F-4D97-AF65-F5344CB8AC3E}">
+        <p14:creationId xmlns:p14="http://schemas.microsoft.com/office/powerpoint/2010/main" val="4142748068"/>
+      </p:ext>
+    </p:extLst>
+  </p:cSld>
+  <p:clrMapOvr>
+    <a:masterClrMapping/>
+  </p:clrMapOvr>
+</p:sld>
+</file>
+
+<file path=ppt/slides/slide22.xml><?xml version="1.0" encoding="utf-8"?>
+<p:sld xmlns:a="http://schemas.openxmlformats.org/drawingml/2006/main" xmlns:r="http://schemas.openxmlformats.org/officeDocument/2006/relationships" xmlns:p="http://schemas.openxmlformats.org/presentationml/2006/main">
+  <p:cSld>
+    <p:spTree>
+      <p:nvGrpSpPr>
+        <p:cNvPr id="1" name=""/>
+        <p:cNvGrpSpPr/>
+        <p:nvPr/>
+      </p:nvGrpSpPr>
+      <p:grpSpPr>
+        <a:xfrm>
+          <a:off x="0" y="0"/>
+          <a:ext cx="0" cy="0"/>
+          <a:chOff x="0" y="0"/>
+          <a:chExt cx="0" cy="0"/>
+        </a:xfrm>
+      </p:grpSpPr>
+      <p:sp>
+        <p:nvSpPr>
+          <p:cNvPr id="2" name="Title 1">
+            <a:extLst>
+              <a:ext uri="{FF2B5EF4-FFF2-40B4-BE49-F238E27FC236}">
+                <a16:creationId xmlns:a16="http://schemas.microsoft.com/office/drawing/2014/main" id="{CF962D43-8A96-E641-793D-64308330947C}"/>
+              </a:ext>
+            </a:extLst>
+          </p:cNvPr>
+          <p:cNvSpPr>
+            <a:spLocks noGrp="1"/>
+          </p:cNvSpPr>
+          <p:nvPr>
+            <p:ph type="title"/>
+          </p:nvPr>
+        </p:nvSpPr>
+        <p:spPr/>
+        <p:txBody>
+          <a:bodyPr>
+            <a:normAutofit fontScale="90000"/>
+          </a:bodyPr>
+          <a:lstStyle/>
+          <a:p>
+            <a:br>
+              <a:rPr lang="en-GB" dirty="0"/>
+            </a:br>
+            <a:r>
+              <a:rPr lang="en-GB" dirty="0"/>
+              <a:t>Information Gain Analysis</a:t>
+            </a:r>
+            <a:br>
+              <a:rPr lang="en-GB" dirty="0"/>
+            </a:br>
+            <a:endParaRPr lang="en-IL" dirty="0"/>
+          </a:p>
+        </p:txBody>
+      </p:sp>
+      <p:sp>
+        <p:nvSpPr>
+          <p:cNvPr id="4" name="Slide Number Placeholder 3">
+            <a:extLst>
+              <a:ext uri="{FF2B5EF4-FFF2-40B4-BE49-F238E27FC236}">
+                <a16:creationId xmlns:a16="http://schemas.microsoft.com/office/drawing/2014/main" id="{6903A020-4037-9572-701B-68E38E4F03AD}"/>
+              </a:ext>
+            </a:extLst>
+          </p:cNvPr>
+          <p:cNvSpPr>
+            <a:spLocks noGrp="1"/>
+          </p:cNvSpPr>
+          <p:nvPr>
+            <p:ph type="sldNum" sz="quarter" idx="12"/>
+          </p:nvPr>
+        </p:nvSpPr>
+        <p:spPr/>
+        <p:txBody>
+          <a:bodyPr/>
+          <a:lstStyle/>
+          <a:p>
+            <a:fld id="{E6AB8EDD-9EF2-4633-A1C2-4D908C1019B4}" type="slidenum">
+              <a:rPr lang="he-IL" smtClean="0"/>
+              <a:t>22</a:t>
+            </a:fld>
+            <a:endParaRPr lang="he-IL"/>
+          </a:p>
+        </p:txBody>
+      </p:sp>
+      <p:pic>
+        <p:nvPicPr>
+          <p:cNvPr id="5" name="Picture 4">
+            <a:extLst>
+              <a:ext uri="{FF2B5EF4-FFF2-40B4-BE49-F238E27FC236}">
+                <a16:creationId xmlns:a16="http://schemas.microsoft.com/office/drawing/2014/main" id="{B5A4A153-E232-FAA2-DC96-F91B9E5145A7}"/>
+              </a:ext>
+            </a:extLst>
+          </p:cNvPr>
+          <p:cNvPicPr>
+            <a:picLocks noChangeAspect="1"/>
+          </p:cNvPicPr>
+          <p:nvPr/>
+        </p:nvPicPr>
+        <p:blipFill>
+          <a:blip r:embed="rId2"/>
+          <a:stretch>
+            <a:fillRect/>
+          </a:stretch>
+        </p:blipFill>
+        <p:spPr>
+          <a:xfrm>
+            <a:off x="1722471" y="1432795"/>
+            <a:ext cx="9881191" cy="4906100"/>
+          </a:xfrm>
+          <a:prstGeom prst="rect">
+            <a:avLst/>
+          </a:prstGeom>
+        </p:spPr>
+      </p:pic>
+    </p:spTree>
+    <p:extLst>
+      <p:ext uri="{BB962C8B-B14F-4D97-AF65-F5344CB8AC3E}">
+        <p14:creationId xmlns:p14="http://schemas.microsoft.com/office/powerpoint/2010/main" val="1008707104"/>
+      </p:ext>
+    </p:extLst>
+  </p:cSld>
+  <p:clrMapOvr>
+    <a:masterClrMapping/>
+  </p:clrMapOvr>
+</p:sld>
+</file>
+
+<file path=ppt/slides/slide23.xml><?xml version="1.0" encoding="utf-8"?>
+<p:sld xmlns:a="http://schemas.openxmlformats.org/drawingml/2006/main" xmlns:r="http://schemas.openxmlformats.org/officeDocument/2006/relationships" xmlns:p="http://schemas.openxmlformats.org/presentationml/2006/main">
+  <p:cSld>
+    <p:spTree>
+      <p:nvGrpSpPr>
+        <p:cNvPr id="1" name="">
+          <a:extLst>
+            <a:ext uri="{FF2B5EF4-FFF2-40B4-BE49-F238E27FC236}">
+              <a16:creationId xmlns:a16="http://schemas.microsoft.com/office/drawing/2014/main" id="{457901D6-A326-98B8-5EC2-919A0AACD6AE}"/>
+            </a:ext>
+          </a:extLst>
+        </p:cNvPr>
+        <p:cNvGrpSpPr/>
+        <p:nvPr/>
+      </p:nvGrpSpPr>
+      <p:grpSpPr>
+        <a:xfrm>
+          <a:off x="0" y="0"/>
+          <a:ext cx="0" cy="0"/>
+          <a:chOff x="0" y="0"/>
+          <a:chExt cx="0" cy="0"/>
+        </a:xfrm>
+      </p:grpSpPr>
+      <p:sp>
+        <p:nvSpPr>
+          <p:cNvPr id="2" name="Title 1">
+            <a:extLst>
+              <a:ext uri="{FF2B5EF4-FFF2-40B4-BE49-F238E27FC236}">
+                <a16:creationId xmlns:a16="http://schemas.microsoft.com/office/drawing/2014/main" id="{6CC804BE-D730-1611-EB41-47F77E88DCB3}"/>
+              </a:ext>
+            </a:extLst>
+          </p:cNvPr>
+          <p:cNvSpPr>
+            <a:spLocks noGrp="1"/>
+          </p:cNvSpPr>
+          <p:nvPr>
+            <p:ph type="title"/>
+          </p:nvPr>
+        </p:nvSpPr>
+        <p:spPr/>
+        <p:txBody>
+          <a:bodyPr/>
+          <a:lstStyle/>
+          <a:p>
+            <a:r>
+              <a:rPr lang="en-US" dirty="0"/>
+              <a:t>Terms &amp; Definitions – </a:t>
+            </a:r>
+            <a:r>
+              <a:rPr lang="en-GB" dirty="0"/>
+              <a:t>Boost </a:t>
+            </a:r>
+            <a:br>
+              <a:rPr lang="en-GB" dirty="0"/>
+            </a:br>
+            <a:r>
+              <a:rPr lang="en-GB" sz="3600" dirty="0"/>
+              <a:t>(once more)</a:t>
+            </a:r>
+            <a:endParaRPr lang="en-IL" dirty="0"/>
+          </a:p>
+        </p:txBody>
+      </p:sp>
+      <p:sp>
+        <p:nvSpPr>
+          <p:cNvPr id="3" name="Content Placeholder 2">
+            <a:extLst>
+              <a:ext uri="{FF2B5EF4-FFF2-40B4-BE49-F238E27FC236}">
+                <a16:creationId xmlns:a16="http://schemas.microsoft.com/office/drawing/2014/main" id="{E0B56EC4-2D10-E491-16CD-11CAE1ECE1C6}"/>
+              </a:ext>
+            </a:extLst>
+          </p:cNvPr>
+          <p:cNvSpPr>
+            <a:spLocks noGrp="1"/>
+          </p:cNvSpPr>
+          <p:nvPr>
+            <p:ph idx="1"/>
+          </p:nvPr>
+        </p:nvSpPr>
+        <p:spPr/>
+        <p:txBody>
+          <a:bodyPr/>
+          <a:lstStyle/>
+          <a:p>
+            <a:r>
+              <a:rPr lang="en-GB" b="1" dirty="0"/>
+              <a:t>Boost author: </a:t>
+            </a:r>
+            <a:r>
+              <a:rPr lang="en-GB" dirty="0"/>
+              <a:t>An author whose activity is followed by a significant increase in discussion activity.</a:t>
+            </a:r>
+          </a:p>
+          <a:p>
+            <a:r>
+              <a:rPr lang="en-GB" b="1" dirty="0"/>
+              <a:t>Author`s Boost Score: </a:t>
+            </a:r>
+            <a:r>
+              <a:rPr lang="en-GB" dirty="0"/>
+              <a:t>A quantitative measure calculated as the cumulative burst weights associated with a user's activity, based on discussion volume increases occurring shortly after the user posts or contributes.</a:t>
+            </a:r>
+          </a:p>
+          <a:p>
+            <a:endParaRPr lang="en-IL" dirty="0"/>
+          </a:p>
+        </p:txBody>
+      </p:sp>
+      <p:sp>
+        <p:nvSpPr>
+          <p:cNvPr id="4" name="Slide Number Placeholder 3">
+            <a:extLst>
+              <a:ext uri="{FF2B5EF4-FFF2-40B4-BE49-F238E27FC236}">
+                <a16:creationId xmlns:a16="http://schemas.microsoft.com/office/drawing/2014/main" id="{39184F02-C69B-3746-AB0E-5F4CB62FF7BC}"/>
+              </a:ext>
+            </a:extLst>
+          </p:cNvPr>
+          <p:cNvSpPr>
+            <a:spLocks noGrp="1"/>
+          </p:cNvSpPr>
+          <p:nvPr>
+            <p:ph type="sldNum" sz="quarter" idx="12"/>
+          </p:nvPr>
+        </p:nvSpPr>
+        <p:spPr/>
+        <p:txBody>
+          <a:bodyPr/>
+          <a:lstStyle/>
+          <a:p>
+            <a:fld id="{E6AB8EDD-9EF2-4633-A1C2-4D908C1019B4}" type="slidenum">
+              <a:rPr lang="he-IL" smtClean="0"/>
+              <a:t>23</a:t>
+            </a:fld>
+            <a:endParaRPr lang="he-IL"/>
+          </a:p>
+        </p:txBody>
+      </p:sp>
+    </p:spTree>
+    <p:extLst>
+      <p:ext uri="{BB962C8B-B14F-4D97-AF65-F5344CB8AC3E}">
+        <p14:creationId xmlns:p14="http://schemas.microsoft.com/office/powerpoint/2010/main" val="1749868302"/>
+      </p:ext>
+    </p:extLst>
+  </p:cSld>
+  <p:clrMapOvr>
+    <a:masterClrMapping/>
+  </p:clrMapOvr>
+</p:sld>
+</file>
+
+<file path=ppt/slides/slide24.xml><?xml version="1.0" encoding="utf-8"?>
+<p:sld xmlns:a="http://schemas.openxmlformats.org/drawingml/2006/main" xmlns:r="http://schemas.openxmlformats.org/officeDocument/2006/relationships" xmlns:p="http://schemas.openxmlformats.org/presentationml/2006/main">
+  <p:cSld>
+    <p:spTree>
+      <p:nvGrpSpPr>
+        <p:cNvPr id="1" name=""/>
+        <p:cNvGrpSpPr/>
+        <p:nvPr/>
+      </p:nvGrpSpPr>
+      <p:grpSpPr>
+        <a:xfrm>
+          <a:off x="0" y="0"/>
+          <a:ext cx="0" cy="0"/>
+          <a:chOff x="0" y="0"/>
+          <a:chExt cx="0" cy="0"/>
+        </a:xfrm>
+      </p:grpSpPr>
+      <p:sp>
+        <p:nvSpPr>
+          <p:cNvPr id="2" name="Title 1">
+            <a:extLst>
+              <a:ext uri="{FF2B5EF4-FFF2-40B4-BE49-F238E27FC236}">
+                <a16:creationId xmlns:a16="http://schemas.microsoft.com/office/drawing/2014/main" id="{D35A903E-E174-C7E1-24CB-FA04759FAF07}"/>
+              </a:ext>
+            </a:extLst>
+          </p:cNvPr>
+          <p:cNvSpPr>
+            <a:spLocks noGrp="1"/>
+          </p:cNvSpPr>
+          <p:nvPr>
+            <p:ph type="title"/>
+          </p:nvPr>
+        </p:nvSpPr>
+        <p:spPr/>
+        <p:txBody>
+          <a:bodyPr/>
+          <a:lstStyle/>
+          <a:p>
+            <a:r>
+              <a:rPr lang="en-US" dirty="0"/>
+              <a:t>Boost Authors</a:t>
+            </a:r>
+            <a:endParaRPr lang="en-IL" dirty="0"/>
+          </a:p>
+        </p:txBody>
+      </p:sp>
+      <p:sp>
+        <p:nvSpPr>
+          <p:cNvPr id="3" name="Content Placeholder 2">
+            <a:extLst>
+              <a:ext uri="{FF2B5EF4-FFF2-40B4-BE49-F238E27FC236}">
+                <a16:creationId xmlns:a16="http://schemas.microsoft.com/office/drawing/2014/main" id="{B0EEA240-983E-2D26-E5AF-E24E046ABE96}"/>
+              </a:ext>
+            </a:extLst>
+          </p:cNvPr>
+          <p:cNvSpPr>
+            <a:spLocks noGrp="1"/>
+          </p:cNvSpPr>
+          <p:nvPr>
+            <p:ph idx="1"/>
+          </p:nvPr>
+        </p:nvSpPr>
+        <p:spPr/>
+        <p:txBody>
+          <a:bodyPr/>
+          <a:lstStyle/>
+          <a:p>
+            <a:pPr marL="457200"/>
+            <a:r>
+              <a:rPr lang="en-US" b="1" dirty="0"/>
+              <a:t>Signal Detection</a:t>
+            </a:r>
+            <a:r>
+              <a:rPr lang="en-US" dirty="0"/>
+              <a:t> Aggregate posts into 5-min bins and </a:t>
+            </a:r>
+            <a:r>
+              <a:rPr lang="en-US" b="1" dirty="0"/>
+              <a:t>compute</a:t>
+            </a:r>
+            <a:r>
+              <a:rPr lang="en-US" dirty="0"/>
+              <a:t> the growth (delta) between consecutive windows.</a:t>
+            </a:r>
+          </a:p>
+          <a:p>
+            <a:pPr marL="457200"/>
+            <a:r>
+              <a:rPr lang="en-US" b="1" dirty="0"/>
+              <a:t>Statistical Filtering</a:t>
+            </a:r>
+            <a:r>
+              <a:rPr lang="en-US" dirty="0"/>
+              <a:t> Apply a Z-score threshold (Z &gt; 3) to isolate statistically significant activity bursts.</a:t>
+            </a:r>
+          </a:p>
+          <a:p>
+            <a:pPr marL="457200"/>
+            <a:r>
+              <a:rPr lang="en-US" b="1" dirty="0"/>
+              <a:t>Temporal Lookback</a:t>
+            </a:r>
+            <a:r>
+              <a:rPr lang="en-US" dirty="0"/>
+              <a:t> For each burst, examine the 5-min window immediately preceding the spike.</a:t>
+            </a:r>
+          </a:p>
+          <a:p>
+            <a:pPr marL="457200"/>
+            <a:r>
+              <a:rPr lang="en-US" b="1" dirty="0"/>
+              <a:t>Boost Attribution</a:t>
+            </a:r>
+            <a:r>
+              <a:rPr lang="en-US" dirty="0"/>
+              <a:t> Distribute burst intensity evenly among lookback users to form each account's Boost Score.</a:t>
+            </a:r>
+          </a:p>
+          <a:p>
+            <a:endParaRPr lang="en-IL" dirty="0"/>
+          </a:p>
+        </p:txBody>
+      </p:sp>
+      <p:sp>
+        <p:nvSpPr>
+          <p:cNvPr id="4" name="Slide Number Placeholder 3">
+            <a:extLst>
+              <a:ext uri="{FF2B5EF4-FFF2-40B4-BE49-F238E27FC236}">
+                <a16:creationId xmlns:a16="http://schemas.microsoft.com/office/drawing/2014/main" id="{D2718226-0C65-5496-46E8-596E9DE51327}"/>
+              </a:ext>
+            </a:extLst>
+          </p:cNvPr>
+          <p:cNvSpPr>
+            <a:spLocks noGrp="1"/>
+          </p:cNvSpPr>
+          <p:nvPr>
+            <p:ph type="sldNum" sz="quarter" idx="12"/>
+          </p:nvPr>
+        </p:nvSpPr>
+        <p:spPr/>
+        <p:txBody>
+          <a:bodyPr/>
+          <a:lstStyle/>
+          <a:p>
+            <a:fld id="{E6AB8EDD-9EF2-4633-A1C2-4D908C1019B4}" type="slidenum">
+              <a:rPr lang="he-IL" smtClean="0"/>
+              <a:t>24</a:t>
+            </a:fld>
+            <a:endParaRPr lang="he-IL"/>
+          </a:p>
+        </p:txBody>
+      </p:sp>
+    </p:spTree>
+    <p:extLst>
+      <p:ext uri="{BB962C8B-B14F-4D97-AF65-F5344CB8AC3E}">
+        <p14:creationId xmlns:p14="http://schemas.microsoft.com/office/powerpoint/2010/main" val="1149901232"/>
+      </p:ext>
+    </p:extLst>
+  </p:cSld>
+  <p:clrMapOvr>
+    <a:masterClrMapping/>
+  </p:clrMapOvr>
+</p:sld>
+</file>
+
+<file path=ppt/slides/slide25.xml><?xml version="1.0" encoding="utf-8"?>
+<p:sld xmlns:a="http://schemas.openxmlformats.org/drawingml/2006/main" xmlns:r="http://schemas.openxmlformats.org/officeDocument/2006/relationships" xmlns:p="http://schemas.openxmlformats.org/presentationml/2006/main">
+  <p:cSld>
+    <p:spTree>
+      <p:nvGrpSpPr>
+        <p:cNvPr id="1" name="">
+          <a:extLst>
+            <a:ext uri="{FF2B5EF4-FFF2-40B4-BE49-F238E27FC236}">
+              <a16:creationId xmlns:a16="http://schemas.microsoft.com/office/drawing/2014/main" id="{091EA2A6-6032-44EC-5E2F-731A0B52F378}"/>
+            </a:ext>
+          </a:extLst>
+        </p:cNvPr>
+        <p:cNvGrpSpPr/>
+        <p:nvPr/>
+      </p:nvGrpSpPr>
+      <p:grpSpPr>
+        <a:xfrm>
+          <a:off x="0" y="0"/>
+          <a:ext cx="0" cy="0"/>
+          <a:chOff x="0" y="0"/>
+          <a:chExt cx="0" cy="0"/>
+        </a:xfrm>
+      </p:grpSpPr>
+      <p:sp>
+        <p:nvSpPr>
+          <p:cNvPr id="2" name="Title 1">
+            <a:extLst>
+              <a:ext uri="{FF2B5EF4-FFF2-40B4-BE49-F238E27FC236}">
+                <a16:creationId xmlns:a16="http://schemas.microsoft.com/office/drawing/2014/main" id="{688D8AB6-A063-421C-CF64-A4A5D366203D}"/>
+              </a:ext>
+            </a:extLst>
+          </p:cNvPr>
+          <p:cNvSpPr>
+            <a:spLocks noGrp="1"/>
+          </p:cNvSpPr>
+          <p:nvPr>
+            <p:ph type="title"/>
+          </p:nvPr>
+        </p:nvSpPr>
+        <p:spPr>
+          <a:xfrm>
+            <a:off x="3072268" y="92253"/>
+            <a:ext cx="8753475" cy="1325563"/>
+          </a:xfrm>
+        </p:spPr>
+        <p:txBody>
+          <a:bodyPr/>
+          <a:lstStyle/>
+          <a:p>
+            <a:r>
+              <a:rPr lang="en-US" dirty="0"/>
+              <a:t>Boost Authors</a:t>
+            </a:r>
+            <a:endParaRPr lang="en-IL" dirty="0"/>
+          </a:p>
+        </p:txBody>
+      </p:sp>
+      <p:sp>
+        <p:nvSpPr>
+          <p:cNvPr id="4" name="Slide Number Placeholder 3">
+            <a:extLst>
+              <a:ext uri="{FF2B5EF4-FFF2-40B4-BE49-F238E27FC236}">
+                <a16:creationId xmlns:a16="http://schemas.microsoft.com/office/drawing/2014/main" id="{FDBC3C71-49AD-862B-483A-6EED5D92D7BD}"/>
+              </a:ext>
+            </a:extLst>
+          </p:cNvPr>
+          <p:cNvSpPr>
+            <a:spLocks noGrp="1"/>
+          </p:cNvSpPr>
+          <p:nvPr>
+            <p:ph type="sldNum" sz="quarter" idx="12"/>
+          </p:nvPr>
+        </p:nvSpPr>
+        <p:spPr/>
+        <p:txBody>
+          <a:bodyPr/>
+          <a:lstStyle/>
+          <a:p>
+            <a:fld id="{E6AB8EDD-9EF2-4633-A1C2-4D908C1019B4}" type="slidenum">
+              <a:rPr lang="he-IL" smtClean="0"/>
+              <a:t>25</a:t>
+            </a:fld>
+            <a:endParaRPr lang="he-IL"/>
+          </a:p>
+        </p:txBody>
+      </p:sp>
+      <p:pic>
+        <p:nvPicPr>
+          <p:cNvPr id="5" name="Picture 6">
+            <a:extLst>
+              <a:ext uri="{FF2B5EF4-FFF2-40B4-BE49-F238E27FC236}">
+                <a16:creationId xmlns:a16="http://schemas.microsoft.com/office/drawing/2014/main" id="{23A70528-D865-4107-BD86-D7E3D63FD125}"/>
+              </a:ext>
+            </a:extLst>
+          </p:cNvPr>
+          <p:cNvPicPr>
+            <a:picLocks noGrp="1" noChangeAspect="1" noChangeArrowheads="1"/>
+          </p:cNvPicPr>
+          <p:nvPr>
+            <p:ph idx="1"/>
+          </p:nvPr>
+        </p:nvPicPr>
+        <p:blipFill rotWithShape="1">
+          <a:blip r:embed="rId2">
+            <a:extLst>
+              <a:ext uri="{28A0092B-C50C-407E-A947-70E740481C1C}">
+                <a14:useLocalDpi xmlns:a14="http://schemas.microsoft.com/office/drawing/2010/main" val="0"/>
+              </a:ext>
+            </a:extLst>
+          </a:blip>
+          <a:srcRect t="50000"/>
+          <a:stretch>
+            <a:fillRect/>
+          </a:stretch>
+        </p:blipFill>
+        <p:spPr bwMode="auto">
+          <a:xfrm>
+            <a:off x="1576746" y="1068301"/>
+            <a:ext cx="9918568" cy="2806883"/>
+          </a:xfrm>
+          <a:prstGeom prst="rect">
+            <a:avLst/>
+          </a:prstGeom>
+          <a:noFill/>
+          <a:extLst>
+            <a:ext uri="{909E8E84-426E-40DD-AFC4-6F175D3DCCD1}">
+              <a14:hiddenFill xmlns:a14="http://schemas.microsoft.com/office/drawing/2010/main">
+                <a:solidFill>
+                  <a:srgbClr val="FFFFFF"/>
+                </a:solidFill>
+              </a14:hiddenFill>
+            </a:ext>
+          </a:extLst>
+        </p:spPr>
+      </p:pic>
+      <p:sp>
+        <p:nvSpPr>
+          <p:cNvPr id="6" name="AutoShape 2">
+            <a:extLst>
+              <a:ext uri="{FF2B5EF4-FFF2-40B4-BE49-F238E27FC236}">
+                <a16:creationId xmlns:a16="http://schemas.microsoft.com/office/drawing/2014/main" id="{ADC69D9E-40C2-0407-6347-E0AAD8330E7B}"/>
+              </a:ext>
+            </a:extLst>
+          </p:cNvPr>
+          <p:cNvSpPr>
+            <a:spLocks noChangeAspect="1" noChangeArrowheads="1"/>
+          </p:cNvSpPr>
+          <p:nvPr/>
+        </p:nvSpPr>
+        <p:spPr bwMode="auto">
+          <a:xfrm>
+            <a:off x="5943600" y="3276600"/>
+            <a:ext cx="304800" cy="304800"/>
+          </a:xfrm>
+          <a:prstGeom prst="rect">
+            <a:avLst/>
+          </a:prstGeom>
+          <a:noFill/>
+          <a:extLst>
+            <a:ext uri="{909E8E84-426E-40DD-AFC4-6F175D3DCCD1}">
+              <a14:hiddenFill xmlns:a14="http://schemas.microsoft.com/office/drawing/2010/main">
+                <a:solidFill>
+                  <a:srgbClr val="FFFFFF"/>
+                </a:solidFill>
+              </a14:hiddenFill>
+            </a:ext>
+          </a:extLst>
+        </p:spPr>
+        <p:txBody>
+          <a:bodyPr vert="horz" wrap="square" lIns="91440" tIns="45720" rIns="91440" bIns="45720" numCol="1" anchor="t" anchorCtr="0" compatLnSpc="1">
+            <a:prstTxWarp prst="textNoShape">
+              <a:avLst/>
+            </a:prstTxWarp>
+          </a:bodyPr>
+          <a:lstStyle/>
+          <a:p>
+            <a:endParaRPr lang="en-IL"/>
+          </a:p>
+        </p:txBody>
+      </p:sp>
+      <p:pic>
+        <p:nvPicPr>
+          <p:cNvPr id="9" name="Picture 8">
+            <a:extLst>
+              <a:ext uri="{FF2B5EF4-FFF2-40B4-BE49-F238E27FC236}">
+                <a16:creationId xmlns:a16="http://schemas.microsoft.com/office/drawing/2014/main" id="{5C2076CA-313A-8F65-D1F7-9E9D6616BE83}"/>
+              </a:ext>
+            </a:extLst>
+          </p:cNvPr>
+          <p:cNvPicPr>
+            <a:picLocks noChangeAspect="1"/>
+          </p:cNvPicPr>
+          <p:nvPr/>
+        </p:nvPicPr>
+        <p:blipFill>
+          <a:blip r:embed="rId3">
+            <a:extLst>
+              <a:ext uri="{28A0092B-C50C-407E-A947-70E740481C1C}">
+                <a14:useLocalDpi xmlns:a14="http://schemas.microsoft.com/office/drawing/2010/main" val="0"/>
+              </a:ext>
+            </a:extLst>
+          </a:blip>
+          <a:stretch>
+            <a:fillRect/>
+          </a:stretch>
+        </p:blipFill>
+        <p:spPr>
+          <a:xfrm>
+            <a:off x="1588180" y="3941232"/>
+            <a:ext cx="6772049" cy="2765323"/>
+          </a:xfrm>
+          <a:prstGeom prst="rect">
+            <a:avLst/>
+          </a:prstGeom>
+        </p:spPr>
+      </p:pic>
+    </p:spTree>
+    <p:extLst>
+      <p:ext uri="{BB962C8B-B14F-4D97-AF65-F5344CB8AC3E}">
+        <p14:creationId xmlns:p14="http://schemas.microsoft.com/office/powerpoint/2010/main" val="3761773978"/>
       </p:ext>
     </p:extLst>
   </p:cSld>
@@ -12073,7 +14094,13 @@
   <p:cSld>
     <p:spTree>
       <p:nvGrpSpPr>
-        <p:cNvPr id="1" name=""/>
+        <p:cNvPr id="1" name="">
+          <a:extLst>
+            <a:ext uri="{FF2B5EF4-FFF2-40B4-BE49-F238E27FC236}">
+              <a16:creationId xmlns:a16="http://schemas.microsoft.com/office/drawing/2014/main" id="{96A50E01-4300-3DE5-CB26-B50E4D0BA361}"/>
+            </a:ext>
+          </a:extLst>
+        </p:cNvPr>
         <p:cNvGrpSpPr/>
         <p:nvPr/>
       </p:nvGrpSpPr>
@@ -12090,7 +14117,7 @@
           <p:cNvPr id="2" name="Title 1">
             <a:extLst>
               <a:ext uri="{FF2B5EF4-FFF2-40B4-BE49-F238E27FC236}">
-                <a16:creationId xmlns:a16="http://schemas.microsoft.com/office/drawing/2014/main" id="{E180CF04-DED3-2E08-8761-891A60FEF6EA}"/>
+                <a16:creationId xmlns:a16="http://schemas.microsoft.com/office/drawing/2014/main" id="{4DB2747D-9283-B209-7194-59E0EF3956D6}"/>
               </a:ext>
             </a:extLst>
           </p:cNvPr>
@@ -12108,7 +14135,7 @@
           <a:p>
             <a:r>
               <a:rPr lang="en-US" dirty="0"/>
-              <a:t>Indicators</a:t>
+              <a:t>Indicators: Graph Theory </a:t>
             </a:r>
             <a:endParaRPr lang="en-IL" dirty="0"/>
           </a:p>
@@ -12119,7 +14146,7 @@
           <p:cNvPr id="3" name="Content Placeholder 2">
             <a:extLst>
               <a:ext uri="{FF2B5EF4-FFF2-40B4-BE49-F238E27FC236}">
-                <a16:creationId xmlns:a16="http://schemas.microsoft.com/office/drawing/2014/main" id="{61818744-AA3F-0C94-68C3-B98E69E97B93}"/>
+                <a16:creationId xmlns:a16="http://schemas.microsoft.com/office/drawing/2014/main" id="{C00DF79D-7189-E660-2269-D00740213DB6}"/>
               </a:ext>
             </a:extLst>
           </p:cNvPr>
@@ -12138,13 +14165,13 @@
         </p:spPr>
         <p:txBody>
           <a:bodyPr>
-            <a:normAutofit fontScale="92500" lnSpcReduction="20000"/>
+            <a:normAutofit lnSpcReduction="10000"/>
           </a:bodyPr>
           <a:lstStyle/>
           <a:p>
             <a:r>
               <a:rPr lang="en-GB" b="1" dirty="0"/>
-              <a:t>Degree centrality: </a:t>
+              <a:t>Degree Centrality: </a:t>
             </a:r>
             <a:r>
               <a:rPr lang="en-GB" dirty="0"/>
@@ -12154,7 +14181,7 @@
           <a:p>
             <a:r>
               <a:rPr lang="en-GB" b="1" dirty="0"/>
-              <a:t>Betweenness centrality: </a:t>
+              <a:t>Betweenness Centrality: </a:t>
             </a:r>
             <a:r>
               <a:rPr lang="en-GB" dirty="0"/>
@@ -12164,7 +14191,7 @@
           <a:p>
             <a:r>
               <a:rPr lang="en-GB" b="1" dirty="0"/>
-              <a:t>Harmonic centrality: </a:t>
+              <a:t>Harmonic Centrality: </a:t>
             </a:r>
             <a:r>
               <a:rPr lang="en-GB" dirty="0"/>
@@ -12174,7 +14201,7 @@
           <a:p>
             <a:r>
               <a:rPr lang="en-GB" b="1" dirty="0"/>
-              <a:t>Eigenvector centrality: </a:t>
+              <a:t>Eigenvector Centrality: </a:t>
             </a:r>
             <a:r>
               <a:rPr lang="en-GB" dirty="0"/>
@@ -12226,52 +14253,13 @@
           <a:p>
             <a:r>
               <a:rPr lang="en-GB" b="1" dirty="0"/>
-              <a:t>Square clustering: </a:t>
+              <a:t>Square Clustering: </a:t>
             </a:r>
             <a:r>
               <a:rPr lang="en-GB" dirty="0"/>
               <a:t>Measures how often a user participates in tightly connected small group structures.</a:t>
             </a:r>
           </a:p>
-          <a:p>
-            <a:r>
-              <a:rPr lang="en-GB" b="1" dirty="0"/>
-              <a:t>Key score sum: </a:t>
-            </a:r>
-            <a:r>
-              <a:rPr lang="en-GB" dirty="0"/>
-              <a:t>The sum of the all the per-topic </a:t>
-            </a:r>
-            <a:r>
-              <a:rPr lang="en-GB" dirty="0" err="1"/>
-              <a:t>tdidf</a:t>
-            </a:r>
-            <a:r>
-              <a:rPr lang="en-GB" dirty="0"/>
-              <a:t> score. How much the author is a leading participant in the topics.</a:t>
-            </a:r>
-          </a:p>
-          <a:p>
-            <a:r>
-              <a:rPr lang="en-GB" b="1" dirty="0">
-                <a:highlight>
-                  <a:srgbClr val="FFFF00"/>
-                </a:highlight>
-              </a:rPr>
-              <a:t>Key score dominance: </a:t>
-            </a:r>
-            <a:r>
-              <a:rPr lang="en-GB" dirty="0">
-                <a:highlight>
-                  <a:srgbClr val="FFFF00"/>
-                </a:highlight>
-              </a:rPr>
-              <a:t>Max score divided by total score. Higher values indicate the author mostly write in specific(s) topic(s).</a:t>
-            </a:r>
-          </a:p>
-          <a:p>
-            <a:endParaRPr lang="en-IL" dirty="0"/>
-          </a:p>
         </p:txBody>
       </p:sp>
       <p:sp>
@@ -12279,7 +14267,7 @@
           <p:cNvPr id="4" name="Slide Number Placeholder 3">
             <a:extLst>
               <a:ext uri="{FF2B5EF4-FFF2-40B4-BE49-F238E27FC236}">
-                <a16:creationId xmlns:a16="http://schemas.microsoft.com/office/drawing/2014/main" id="{B369E058-D5C2-C2B9-04B1-D7B341490D5D}"/>
+                <a16:creationId xmlns:a16="http://schemas.microsoft.com/office/drawing/2014/main" id="{FB814CE5-5261-51D2-0ED2-383584D53484}"/>
               </a:ext>
             </a:extLst>
           </p:cNvPr>
@@ -12306,7 +14294,7 @@
     </p:spTree>
     <p:extLst>
       <p:ext uri="{BB962C8B-B14F-4D97-AF65-F5344CB8AC3E}">
-        <p14:creationId xmlns:p14="http://schemas.microsoft.com/office/powerpoint/2010/main" val="3277267947"/>
+        <p14:creationId xmlns:p14="http://schemas.microsoft.com/office/powerpoint/2010/main" val="46111239"/>
       </p:ext>
     </p:extLst>
   </p:cSld>
